--- a/03-build/pptx/C5_U3_docente.pptx
+++ b/03-build/pptx/C5_U3_docente.pptx
@@ -1547,7 +1547,7 @@
           <a:lstStyle/>
           <a:p>
             <a:r>
-              <a:t>TEACHER · FEEDBACK/REPASO. Semáforo = zelfevaluatie. Repaso-drills online (24 spellen + zelfcorrectie). Bruggetje: U4 «Me gusta» (València) — gustos &amp; aficiones (me gusta / me encanta).</a:t>
+              <a:t>TEACHER · FEEDBACK/REPASO. Semáforo = zelfevaluatie. Repaso-drills online (20 spellen + zelfcorrectie). Bruggetje: U4 «Me gusta» (València) — gustos &amp; aficiones (me gusta / me encanta).</a:t>
             </a:r>
           </a:p>
         </p:txBody>
@@ -33563,7 +33563,7 @@
                 </a:solidFill>
                 <a:latin typeface="Inter"/>
               </a:rPr>
-              <a:t>De volledige herhaling (24 spellen, drills) staat online. Hier: de kern + semáforo.</a:t>
+              <a:t>De volledige herhaling (20 spellen, drills) staat online. Hier: de kern + semáforo.</a:t>
             </a:r>
           </a:p>
         </p:txBody>
@@ -35848,7 +35848,7 @@
                 </a:solidFill>
                 <a:latin typeface="Inter"/>
               </a:rPr>
-              <a:t>24 spellen + flip cards + klikbare kaart + recorder («la hora», «mi día», «mensaje de voz») op de página digital. QR's → juiste anker. Conjugador = aparte tool.</a:t>
+              <a:t>20 spellen + flip cards + klikbare kaart + recorder («la hora», «mi día», «mensaje de voz») op de página digital. QR's → juiste anker. Conjugador = aparte tool.</a:t>
             </a:r>
           </a:p>
         </p:txBody>

--- a/03-build/pptx/C5_U3_docente.pptx
+++ b/03-build/pptx/C5_U3_docente.pptx
@@ -8760,7 +8760,6 @@
               <a:srgbClr val="1E9E74"/>
             </a:solidFill>
           </a:ln>
-          <a:effectLst/>
           <a:effectLst>
             <a:outerShdw blurRad="90000" dist="38000" dir="5400000" rotWithShape="0">
               <a:srgbClr val="20242E">
@@ -10852,7 +10851,6 @@
               <a:srgbClr val="E4E3DE"/>
             </a:solidFill>
           </a:ln>
-          <a:effectLst/>
           <a:effectLst>
             <a:outerShdw blurRad="90000" dist="38000" dir="5400000" rotWithShape="0">
               <a:srgbClr val="20242E">
@@ -11176,7 +11174,6 @@
               <a:srgbClr val="E4E3DE"/>
             </a:solidFill>
           </a:ln>
-          <a:effectLst/>
           <a:effectLst>
             <a:outerShdw blurRad="90000" dist="38000" dir="5400000" rotWithShape="0">
               <a:srgbClr val="20242E">
@@ -11500,7 +11497,6 @@
               <a:srgbClr val="E4E3DE"/>
             </a:solidFill>
           </a:ln>
-          <a:effectLst/>
           <a:effectLst>
             <a:outerShdw blurRad="90000" dist="38000" dir="5400000" rotWithShape="0">
               <a:srgbClr val="20242E">
@@ -11824,7 +11820,6 @@
               <a:srgbClr val="E4E3DE"/>
             </a:solidFill>
           </a:ln>
-          <a:effectLst/>
           <a:effectLst>
             <a:outerShdw blurRad="90000" dist="38000" dir="5400000" rotWithShape="0">
               <a:srgbClr val="20242E">
@@ -13607,7 +13602,6 @@
               <a:srgbClr val="E4E3DE"/>
             </a:solidFill>
           </a:ln>
-          <a:effectLst/>
           <a:effectLst>
             <a:outerShdw blurRad="90000" dist="38000" dir="5400000" rotWithShape="0">
               <a:srgbClr val="20242E">
@@ -14286,7 +14280,6 @@
               <a:srgbClr val="1E9E74"/>
             </a:solidFill>
           </a:ln>
-          <a:effectLst/>
           <a:effectLst>
             <a:outerShdw blurRad="90000" dist="38000" dir="5400000" rotWithShape="0">
               <a:srgbClr val="20242E">
@@ -22255,7 +22248,6 @@
               <a:srgbClr val="1E9E74"/>
             </a:solidFill>
           </a:ln>
-          <a:effectLst/>
           <a:effectLst>
             <a:outerShdw blurRad="90000" dist="38000" dir="5400000" rotWithShape="0">
               <a:srgbClr val="20242E">
@@ -22489,7 +22481,6 @@
               <a:srgbClr val="1E9E74"/>
             </a:solidFill>
           </a:ln>
-          <a:effectLst/>
           <a:effectLst>
             <a:outerShdw blurRad="90000" dist="38000" dir="5400000" rotWithShape="0">
               <a:srgbClr val="20242E">
@@ -22723,7 +22714,6 @@
               <a:srgbClr val="1E9E74"/>
             </a:solidFill>
           </a:ln>
-          <a:effectLst/>
           <a:effectLst>
             <a:outerShdw blurRad="90000" dist="38000" dir="5400000" rotWithShape="0">
               <a:srgbClr val="20242E">
@@ -28101,7 +28091,6 @@
               <a:srgbClr val="1E9E74"/>
             </a:solidFill>
           </a:ln>
-          <a:effectLst/>
           <a:effectLst>
             <a:outerShdw blurRad="90000" dist="38000" dir="5400000" rotWithShape="0">
               <a:srgbClr val="20242E">
@@ -28404,7 +28393,6 @@
               <a:srgbClr val="1E9E74"/>
             </a:solidFill>
           </a:ln>
-          <a:effectLst/>
           <a:effectLst>
             <a:outerShdw blurRad="90000" dist="38000" dir="5400000" rotWithShape="0">
               <a:srgbClr val="20242E">
@@ -28707,7 +28695,6 @@
               <a:srgbClr val="1E9E74"/>
             </a:solidFill>
           </a:ln>
-          <a:effectLst/>
           <a:effectLst>
             <a:outerShdw blurRad="90000" dist="38000" dir="5400000" rotWithShape="0">
               <a:srgbClr val="20242E">
@@ -29010,7 +28997,6 @@
               <a:srgbClr val="1E9E74"/>
             </a:solidFill>
           </a:ln>
-          <a:effectLst/>
           <a:effectLst>
             <a:outerShdw blurRad="90000" dist="38000" dir="5400000" rotWithShape="0">
               <a:srgbClr val="20242E">
@@ -29313,7 +29299,6 @@
               <a:srgbClr val="157355"/>
             </a:solidFill>
           </a:ln>
-          <a:effectLst/>
           <a:effectLst>
             <a:outerShdw blurRad="90000" dist="38000" dir="5400000" rotWithShape="0">
               <a:srgbClr val="20242E">
@@ -29616,7 +29601,6 @@
               <a:srgbClr val="157355"/>
             </a:solidFill>
           </a:ln>
-          <a:effectLst/>
           <a:effectLst>
             <a:outerShdw blurRad="90000" dist="38000" dir="5400000" rotWithShape="0">
               <a:srgbClr val="20242E">
@@ -29919,7 +29903,6 @@
               <a:srgbClr val="B7860B"/>
             </a:solidFill>
           </a:ln>
-          <a:effectLst/>
           <a:effectLst>
             <a:outerShdw blurRad="90000" dist="38000" dir="5400000" rotWithShape="0">
               <a:srgbClr val="20242E">
@@ -30222,7 +30205,6 @@
               <a:srgbClr val="157355"/>
             </a:solidFill>
           </a:ln>
-          <a:effectLst/>
           <a:effectLst>
             <a:outerShdw blurRad="90000" dist="38000" dir="5400000" rotWithShape="0">
               <a:srgbClr val="20242E">
@@ -33590,7 +33572,6 @@
           <a:ln>
             <a:noFill/>
           </a:ln>
-          <a:effectLst/>
           <a:effectLst>
             <a:outerShdw blurRad="90000" dist="38000" dir="5400000" rotWithShape="0">
               <a:srgbClr val="20242E">
@@ -35303,7 +35284,6 @@
           <a:ln>
             <a:noFill/>
           </a:ln>
-          <a:effectLst/>
           <a:effectLst>
             <a:outerShdw blurRad="90000" dist="38000" dir="5400000" rotWithShape="0">
               <a:srgbClr val="20242E">
@@ -35446,7 +35426,6 @@
           <a:ln>
             <a:noFill/>
           </a:ln>
-          <a:effectLst/>
           <a:effectLst>
             <a:outerShdw blurRad="90000" dist="38000" dir="5400000" rotWithShape="0">
               <a:srgbClr val="20242E">
@@ -35589,7 +35568,6 @@
           <a:ln>
             <a:noFill/>
           </a:ln>
-          <a:effectLst/>
           <a:effectLst>
             <a:outerShdw blurRad="90000" dist="38000" dir="5400000" rotWithShape="0">
               <a:srgbClr val="20242E">
@@ -35732,7 +35710,6 @@
           <a:ln>
             <a:noFill/>
           </a:ln>
-          <a:effectLst/>
           <a:effectLst>
             <a:outerShdw blurRad="90000" dist="38000" dir="5400000" rotWithShape="0">
               <a:srgbClr val="20242E">
@@ -35875,7 +35852,6 @@
           <a:ln>
             <a:noFill/>
           </a:ln>
-          <a:effectLst/>
           <a:effectLst>
             <a:outerShdw blurRad="90000" dist="38000" dir="5400000" rotWithShape="0">
               <a:srgbClr val="20242E">
@@ -39245,7 +39221,6 @@
           <a:ln>
             <a:noFill/>
           </a:ln>
-          <a:effectLst/>
           <a:effectLst>
             <a:outerShdw blurRad="90000" dist="38000" dir="5400000" rotWithShape="0">
               <a:srgbClr val="20242E">
@@ -41294,7 +41269,6 @@
               <a:srgbClr val="1E9E74"/>
             </a:solidFill>
           </a:ln>
-          <a:effectLst/>
           <a:effectLst>
             <a:outerShdw blurRad="90000" dist="38000" dir="5400000" rotWithShape="0">
               <a:srgbClr val="20242E">
@@ -41439,7 +41413,6 @@
               <a:srgbClr val="1E9E74"/>
             </a:solidFill>
           </a:ln>
-          <a:effectLst/>
           <a:effectLst>
             <a:outerShdw blurRad="90000" dist="38000" dir="5400000" rotWithShape="0">
               <a:srgbClr val="20242E">
@@ -41584,7 +41557,6 @@
               <a:srgbClr val="1E9E74"/>
             </a:solidFill>
           </a:ln>
-          <a:effectLst/>
           <a:effectLst>
             <a:outerShdw blurRad="90000" dist="38000" dir="5400000" rotWithShape="0">
               <a:srgbClr val="20242E">
@@ -41729,7 +41701,6 @@
               <a:srgbClr val="1E9E74"/>
             </a:solidFill>
           </a:ln>
-          <a:effectLst/>
           <a:effectLst>
             <a:outerShdw blurRad="90000" dist="38000" dir="5400000" rotWithShape="0">
               <a:srgbClr val="20242E">
@@ -41874,7 +41845,6 @@
               <a:srgbClr val="1E9E74"/>
             </a:solidFill>
           </a:ln>
-          <a:effectLst/>
           <a:effectLst>
             <a:outerShdw blurRad="90000" dist="38000" dir="5400000" rotWithShape="0">
               <a:srgbClr val="20242E">
@@ -42019,7 +41989,6 @@
               <a:srgbClr val="1E9E74"/>
             </a:solidFill>
           </a:ln>
-          <a:effectLst/>
           <a:effectLst>
             <a:outerShdw blurRad="90000" dist="38000" dir="5400000" rotWithShape="0">
               <a:srgbClr val="20242E">
@@ -45683,7 +45652,6 @@
           <a:ln>
             <a:noFill/>
           </a:ln>
-          <a:effectLst/>
           <a:effectLst>
             <a:outerShdw blurRad="90000" dist="38000" dir="5400000" rotWithShape="0">
               <a:srgbClr val="20242E">
@@ -45781,7 +45749,6 @@
           <a:ln>
             <a:noFill/>
           </a:ln>
-          <a:effectLst/>
           <a:effectLst>
             <a:outerShdw blurRad="90000" dist="38000" dir="5400000" rotWithShape="0">
               <a:srgbClr val="20242E">
@@ -45879,7 +45846,6 @@
           <a:ln>
             <a:noFill/>
           </a:ln>
-          <a:effectLst/>
           <a:effectLst>
             <a:outerShdw blurRad="90000" dist="38000" dir="5400000" rotWithShape="0">
               <a:srgbClr val="20242E">
@@ -49888,7 +49854,6 @@
           <a:ln>
             <a:noFill/>
           </a:ln>
-          <a:effectLst/>
           <a:effectLst>
             <a:outerShdw blurRad="90000" dist="38000" dir="5400000" rotWithShape="0">
               <a:srgbClr val="20242E">
@@ -49986,7 +49951,6 @@
           <a:ln>
             <a:noFill/>
           </a:ln>
-          <a:effectLst/>
           <a:effectLst>
             <a:outerShdw blurRad="90000" dist="38000" dir="5400000" rotWithShape="0">
               <a:srgbClr val="20242E">
@@ -50084,7 +50048,6 @@
           <a:ln>
             <a:noFill/>
           </a:ln>
-          <a:effectLst/>
           <a:effectLst>
             <a:outerShdw blurRad="90000" dist="38000" dir="5400000" rotWithShape="0">
               <a:srgbClr val="20242E">
@@ -54093,7 +54056,6 @@
           <a:ln>
             <a:noFill/>
           </a:ln>
-          <a:effectLst/>
           <a:effectLst>
             <a:outerShdw blurRad="90000" dist="38000" dir="5400000" rotWithShape="0">
               <a:srgbClr val="20242E">
@@ -54191,7 +54153,6 @@
           <a:ln>
             <a:noFill/>
           </a:ln>
-          <a:effectLst/>
           <a:effectLst>
             <a:outerShdw blurRad="90000" dist="38000" dir="5400000" rotWithShape="0">
               <a:srgbClr val="20242E">
@@ -54289,7 +54250,6 @@
           <a:ln>
             <a:noFill/>
           </a:ln>
-          <a:effectLst/>
           <a:effectLst>
             <a:outerShdw blurRad="90000" dist="38000" dir="5400000" rotWithShape="0">
               <a:srgbClr val="20242E">

--- a/03-build/pptx/C5_U3_docente.pptx
+++ b/03-build/pptx/C5_U3_docente.pptx
@@ -13,6 +13,9 @@
     <p:sldId id="261" r:id="rId13"/>
     <p:sldId id="262" r:id="rId14"/>
     <p:sldId id="263" r:id="rId15"/>
+    <p:sldId id="278" r:id="rId30"/>
+    <p:sldId id="279" r:id="rId31"/>
+    <p:sldId id="280" r:id="rId32"/>
     <p:sldId id="264" r:id="rId16"/>
     <p:sldId id="265" r:id="rId17"/>
     <p:sldId id="266" r:id="rId18"/>
@@ -1633,6 +1636,255 @@
           </p:nvPr>
         </p:nvSpPr>
         <p:spPr/>
+      </p:sp>
+    </p:spTree>
+  </p:cSld>
+  <p:clrMapOvr>
+    <a:masterClrMapping/>
+  </p:clrMapOvr>
+</p:notes>
+</file>
+
+<file path=ppt/notesSlides/notesSlide23.xml><?xml version="1.0" encoding="utf-8"?>
+<p:notes xmlns:a="http://schemas.openxmlformats.org/drawingml/2006/main" xmlns:p="http://schemas.openxmlformats.org/presentationml/2006/main" xmlns:r="http://schemas.openxmlformats.org/officeDocument/2006/relationships">
+  <p:cSld>
+    <p:spTree>
+      <p:nvGrpSpPr>
+        <p:cNvPr id="1" name=""/>
+        <p:cNvGrpSpPr/>
+        <p:nvPr/>
+      </p:nvGrpSpPr>
+      <p:grpSpPr>
+        <a:xfrm>
+          <a:off x="0" y="0"/>
+          <a:ext cx="0" cy="0"/>
+          <a:chOff x="0" y="0"/>
+          <a:chExt cx="0" cy="0"/>
+        </a:xfrm>
+      </p:grpSpPr>
+      <p:sp>
+        <p:nvSpPr>
+          <p:cNvPr id="2" name="Slide Image Placeholder 1"/>
+          <p:cNvSpPr>
+            <a:spLocks noGrp="1"/>
+          </p:cNvSpPr>
+          <p:nvPr>
+            <p:ph type="sldImg" idx="2"/>
+          </p:nvPr>
+        </p:nvSpPr>
+        <p:spPr/>
+      </p:sp>
+      <p:sp>
+        <p:nvSpPr>
+          <p:cNvPr id="3" name="Notes Placeholder 2"/>
+          <p:cNvSpPr>
+            <a:spLocks noGrp="1"/>
+          </p:cNvSpPr>
+          <p:nvPr>
+            <p:ph type="body" idx="3" sz="quarter"/>
+          </p:nvPr>
+        </p:nvSpPr>
+        <p:spPr/>
+        <p:txBody>
+          <a:bodyPr/>
+          <a:lstStyle/>
+          <a:p>
+            <a:r>
+              <a:t>RETO 2 · Zona horaria — 🔬 onderzoek &amp; data</a:t>
+            </a:r>
+          </a:p>
+          <a:p>
+            <a:r>
+              <a:t>OPDRACHT: Zoek het enige uur waarop jullie alle vier wakker zijn.</a:t>
+            </a:r>
+          </a:p>
+          <a:p>
+            <a:r>
+              <a:t>DE REGEL: Iedereen moet tussen 8:00 en 22:00 lokale tijd zitten. Eén persoon buiten dat venster en het voorstel valt af.</a:t>
+            </a:r>
+          </a:p>
+          <a:p>
+            <a:r>
+              <a:t>VERLOOP: Mirad las cuatro zonas horarias. | Probad una hora. ¿Quién duerme? | Buscad la ventana común. | Escribid la invitación con la hora de cada uno.</a:t>
+            </a:r>
+          </a:p>
+          <a:p>
+            <a:r>
+              <a:t>SLEUTEL: Venster: 15:00–22:00 Belgische tijd. Dan is het 8:00–15:00 in Mexico en 9:00–16:00 in Cusco.  ||  16:00 Belgisch is een veilige keuze: 9:00 in CDMX, 10:00 in Cusco, 16:00 in Sevilla.  ||  Sevilla en Gante delen de tijdzone — dat is de gratis vereenvoudiging die de klas meestal over het hoofd ziet.  ||  Verschillen zijn winterwaarden; met zomertijd schuift het één uur. Vermeld dat als een leerling ernaar vraagt.</a:t>
+            </a:r>
+          </a:p>
+          <a:p>
+            <a:r>
+              <a:t>NOTA: Reken met hele uren. Zodra de klas over zomertijd begint, wordt het een rekenles in plaats van een taalles.</a:t>
+            </a:r>
+          </a:p>
+        </p:txBody>
+      </p:sp>
+    </p:spTree>
+  </p:cSld>
+  <p:clrMapOvr>
+    <a:masterClrMapping/>
+  </p:clrMapOvr>
+</p:notes>
+</file>
+
+<file path=ppt/notesSlides/notesSlide24.xml><?xml version="1.0" encoding="utf-8"?>
+<p:notes xmlns:a="http://schemas.openxmlformats.org/drawingml/2006/main" xmlns:p="http://schemas.openxmlformats.org/presentationml/2006/main" xmlns:r="http://schemas.openxmlformats.org/officeDocument/2006/relationships">
+  <p:cSld>
+    <p:spTree>
+      <p:nvGrpSpPr>
+        <p:cNvPr id="1" name=""/>
+        <p:cNvGrpSpPr/>
+        <p:nvPr/>
+      </p:nvGrpSpPr>
+      <p:grpSpPr>
+        <a:xfrm>
+          <a:off x="0" y="0"/>
+          <a:ext cx="0" cy="0"/>
+          <a:chOff x="0" y="0"/>
+          <a:chExt cx="0" cy="0"/>
+        </a:xfrm>
+      </p:grpSpPr>
+      <p:sp>
+        <p:nvSpPr>
+          <p:cNvPr id="2" name="Slide Image Placeholder 1"/>
+          <p:cNvSpPr>
+            <a:spLocks noGrp="1"/>
+          </p:cNvSpPr>
+          <p:nvPr>
+            <p:ph type="sldImg" idx="2"/>
+          </p:nvPr>
+        </p:nvSpPr>
+        <p:spPr/>
+      </p:sp>
+      <p:sp>
+        <p:nvSpPr>
+          <p:cNvPr id="3" name="Notes Placeholder 2"/>
+          <p:cNvSpPr>
+            <a:spLocks noGrp="1"/>
+          </p:cNvSpPr>
+          <p:nvPr>
+            <p:ph type="body" idx="3" sz="quarter"/>
+          </p:nvPr>
+        </p:nvSpPr>
+        <p:spPr/>
+        <p:txBody>
+          <a:bodyPr/>
+          <a:lstStyle/>
+          <a:p>
+            <a:r>
+              <a:t>RETO 8 · Negocia el despertador — ⚖️ onderhandeling &amp; dilemma</a:t>
+            </a:r>
+          </a:p>
+          <a:p>
+            <a:r>
+              <a:t>OPDRACHT: Onderhandel één gezamenlijk schema. Jullie moeten allebei iets opgeven.</a:t>
+            </a:r>
+          </a:p>
+          <a:p>
+            <a:r>
+              <a:t>DE REGEL: Elk voorstel bevat een uur én een reden met «porque». Een voorstel zonder reden mag de ander zonder meer weigeren.</a:t>
+            </a:r>
+          </a:p>
+          <a:p>
+            <a:r>
+              <a:t>VERLOOP: Coge tu rol. No lo enseñes. | Propón tu hora con una razón. | Ceded hasta llegar a un acuerdo. | Escribid la hora final en la pizarra.</a:t>
+            </a:r>
+          </a:p>
+          <a:p>
+            <a:r>
+              <a:t>SLEUTEL: Er is geen juiste uitkomst, wel een toetsbare: bevat elk voorstel een uur én «porque», en heeft élk van de twee iets opgegeven?  ||  De meest gevonden oplossing: wekker om 6:45 met de douche 's avonds voor Álex, en een slaapmasker voor Noa.  ||  Let op «poder»: «no puedo levantarme» — de o→ue-verandering zit precies in het werkwoord dat de hele onderhandeling draagt.</a:t>
+            </a:r>
+          </a:p>
+          <a:p>
+            <a:r>
+              <a:t>NOTA: Geef de rollen echt gescheiden. Zien de leerlingen elkaars kaart, dan verdwijnt de onderhandeling en blijft er een invuloefening over.</a:t>
+            </a:r>
+          </a:p>
+        </p:txBody>
+      </p:sp>
+    </p:spTree>
+  </p:cSld>
+  <p:clrMapOvr>
+    <a:masterClrMapping/>
+  </p:clrMapOvr>
+</p:notes>
+</file>
+
+<file path=ppt/notesSlides/notesSlide25.xml><?xml version="1.0" encoding="utf-8"?>
+<p:notes xmlns:a="http://schemas.openxmlformats.org/drawingml/2006/main" xmlns:p="http://schemas.openxmlformats.org/presentationml/2006/main" xmlns:r="http://schemas.openxmlformats.org/officeDocument/2006/relationships">
+  <p:cSld>
+    <p:spTree>
+      <p:nvGrpSpPr>
+        <p:cNvPr id="1" name=""/>
+        <p:cNvGrpSpPr/>
+        <p:nvPr/>
+      </p:nvGrpSpPr>
+      <p:grpSpPr>
+        <a:xfrm>
+          <a:off x="0" y="0"/>
+          <a:ext cx="0" cy="0"/>
+          <a:chOff x="0" y="0"/>
+          <a:chExt cx="0" cy="0"/>
+        </a:xfrm>
+      </p:grpSpPr>
+      <p:sp>
+        <p:nvSpPr>
+          <p:cNvPr id="2" name="Slide Image Placeholder 1"/>
+          <p:cNvSpPr>
+            <a:spLocks noGrp="1"/>
+          </p:cNvSpPr>
+          <p:nvPr>
+            <p:ph type="sldImg" idx="2"/>
+          </p:nvPr>
+        </p:nvSpPr>
+        <p:spPr/>
+      </p:sp>
+      <p:sp>
+        <p:nvSpPr>
+          <p:cNvPr id="3" name="Notes Placeholder 2"/>
+          <p:cNvSpPr>
+            <a:spLocks noGrp="1"/>
+          </p:cNvSpPr>
+          <p:nvPr>
+            <p:ph type="body" idx="3" sz="quarter"/>
+          </p:nvPr>
+        </p:nvSpPr>
+        <p:spPr/>
+        <p:txBody>
+          <a:bodyPr/>
+          <a:lstStyle/>
+          <a:p>
+            <a:r>
+              <a:t>RETO 10 · La coartada — 🕵️ forensisch</a:t>
+            </a:r>
+          </a:p>
+          <a:p>
+            <a:r>
+              <a:t>OPDRACHT: Per twee verzinnen jullie een alibi met vijf uren. De klas verhoort jullie.</a:t>
+            </a:r>
+          </a:p>
+          <a:p>
+            <a:r>
+              <a:t>DE REGEL: Jullie twee verhalen moeten op de vijf uren identiek zijn — maar jullie worden apart ondervraagd. Eén verschil en het alibi valt.</a:t>
+            </a:r>
+          </a:p>
+          <a:p>
+            <a:r>
+              <a:t>VERLOOP: En parejas: inventad vuestra tarde, hora por hora. | Memorizad. No podéis mirar notas en el interrogatorio. | Uno sale del aula. La clase interroga al otro. | Entra el segundo. ¿Coinciden?</a:t>
+            </a:r>
+          </a:p>
+          <a:p>
+            <a:r>
+              <a:t>SLEUTEL: Het alibi valt bijna altijd op vraag 3 of 5: de bezigheid en de getuige worden zelden even gedetailleerd afgesproken als de uren.  ||  Alles blijft in het presente: de vragen staan hier in de verleden tijd omdat de leerkracht ze stelt, maar de antwoorden mogen in het presente («a las cinco estamos en el parque»). Geen verleden tijd vragen van de leerlingen.  ||  Wie een detail vergeet, mag het niet verzinnen: dan valt het alibi. Dat is de motor.</a:t>
+            </a:r>
+          </a:p>
+          <a:p>
+            <a:r>
+              <a:t>NOTA: Werkt met maximaal zes duo's; daarna zakt de spanning. Laat de rest van de klas de tegenstrijdigheden noteren, dan luistert iedereen mee.</a:t>
+            </a:r>
+          </a:p>
+        </p:txBody>
       </p:sp>
     </p:spTree>
   </p:cSld>
@@ -36165,6 +36417,4117 @@
   <p:clrMapOvr>
     <a:masterClrMapping/>
   </p:clrMapOvr>
+</p:sld>
+</file>
+
+<file path=ppt/slides/slide23.xml><?xml version="1.0" encoding="utf-8"?>
+<p:sld xmlns:a="http://schemas.openxmlformats.org/drawingml/2006/main" xmlns:p="http://schemas.openxmlformats.org/presentationml/2006/main" xmlns:r="http://schemas.openxmlformats.org/officeDocument/2006/relationships">
+  <p:cSld>
+    <p:spTree>
+      <p:nvGrpSpPr>
+        <p:cNvPr id="1" name=""/>
+        <p:cNvGrpSpPr/>
+        <p:nvPr/>
+      </p:nvGrpSpPr>
+      <p:grpSpPr/>
+      <p:sp>
+        <p:nvSpPr>
+          <p:cNvPr id="2" name="Fondo"/>
+          <p:cNvSpPr/>
+          <p:nvPr/>
+        </p:nvSpPr>
+        <p:spPr>
+          <a:xfrm>
+            <a:off x="0" y="0"/>
+            <a:ext cx="12191695" cy="6858000"/>
+          </a:xfrm>
+          <a:prstGeom prst="rect">
+            <a:avLst/>
+          </a:prstGeom>
+          <a:solidFill>
+            <a:srgbClr val="FCFBF8"/>
+          </a:solidFill>
+          <a:ln>
+            <a:noFill/>
+          </a:ln>
+          <a:effectLst/>
+        </p:spPr>
+        <p:style>
+          <a:lnRef idx="1">
+            <a:schemeClr val="accent1"/>
+          </a:lnRef>
+          <a:fillRef idx="3">
+            <a:schemeClr val="accent1"/>
+          </a:fillRef>
+          <a:effectRef idx="2">
+            <a:schemeClr val="accent1"/>
+          </a:effectRef>
+          <a:fontRef idx="minor">
+            <a:schemeClr val="lt1"/>
+          </a:fontRef>
+        </p:style>
+        <p:txBody>
+          <a:bodyPr rtlCol="0" anchor="ctr"/>
+          <a:lstStyle/>
+          <a:p/>
+        </p:txBody>
+      </p:sp>
+      <p:sp>
+        <p:nvSpPr>
+          <p:cNvPr id="3" name="Cabecera"/>
+          <p:cNvSpPr/>
+          <p:nvPr/>
+        </p:nvSpPr>
+        <p:spPr>
+          <a:xfrm>
+            <a:off x="0" y="0"/>
+            <a:ext cx="12191695" cy="1078992"/>
+          </a:xfrm>
+          <a:prstGeom prst="rect">
+            <a:avLst/>
+          </a:prstGeom>
+          <a:solidFill>
+            <a:srgbClr val="1E9E74"/>
+          </a:solidFill>
+          <a:ln>
+            <a:noFill/>
+          </a:ln>
+          <a:effectLst/>
+        </p:spPr>
+        <p:style>
+          <a:lnRef idx="1">
+            <a:schemeClr val="accent1"/>
+          </a:lnRef>
+          <a:fillRef idx="3">
+            <a:schemeClr val="accent1"/>
+          </a:fillRef>
+          <a:effectRef idx="2">
+            <a:schemeClr val="accent1"/>
+          </a:effectRef>
+          <a:fontRef idx="minor">
+            <a:schemeClr val="lt1"/>
+          </a:fontRef>
+        </p:style>
+        <p:txBody>
+          <a:bodyPr rtlCol="0" anchor="ctr"/>
+          <a:lstStyle/>
+          <a:p/>
+        </p:txBody>
+      </p:sp>
+      <p:sp>
+        <p:nvSpPr>
+          <p:cNvPr id="4" name="Chip"/>
+          <p:cNvSpPr/>
+          <p:nvPr/>
+        </p:nvSpPr>
+        <p:spPr>
+          <a:xfrm>
+            <a:off x="457200" y="182880"/>
+            <a:ext cx="3017520" cy="292608"/>
+          </a:xfrm>
+          <a:prstGeom prst="roundRect">
+            <a:avLst>
+              <a:gd name="adj" fmla="val 50000"/>
+            </a:avLst>
+          </a:prstGeom>
+          <a:solidFill>
+            <a:srgbClr val="FFFFFF"/>
+          </a:solidFill>
+          <a:ln>
+            <a:noFill/>
+          </a:ln>
+          <a:effectLst/>
+        </p:spPr>
+        <p:style>
+          <a:lnRef idx="1">
+            <a:schemeClr val="accent1"/>
+          </a:lnRef>
+          <a:fillRef idx="3">
+            <a:schemeClr val="accent1"/>
+          </a:fillRef>
+          <a:effectRef idx="2">
+            <a:schemeClr val="accent1"/>
+          </a:effectRef>
+          <a:fontRef idx="minor">
+            <a:schemeClr val="lt1"/>
+          </a:fontRef>
+        </p:style>
+        <p:txBody>
+          <a:bodyPr rtlCol="0" anchor="ctr"/>
+          <a:lstStyle/>
+          <a:p/>
+        </p:txBody>
+      </p:sp>
+      <p:sp>
+        <p:nvSpPr>
+          <p:cNvPr id="5" name="ChipTxt"/>
+          <p:cNvSpPr txBox="1"/>
+          <p:nvPr/>
+        </p:nvSpPr>
+        <p:spPr>
+          <a:xfrm>
+            <a:off x="457200" y="173736"/>
+            <a:ext cx="3017520" cy="310896"/>
+          </a:xfrm>
+          <a:prstGeom prst="rect">
+            <a:avLst/>
+          </a:prstGeom>
+          <a:noFill/>
+        </p:spPr>
+        <p:txBody>
+          <a:bodyPr wrap="square" anchor="ctr" lIns="45720" rIns="45720" tIns="27432" bIns="27432">
+            <a:normAutofit/>
+          </a:bodyPr>
+          <a:lstStyle/>
+          <a:p>
+            <a:pPr algn="ctr"/>
+            <a:r>
+              <a:rPr sz="950" b="1">
+                <a:solidFill>
+                  <a:srgbClr val="157355"/>
+                </a:solidFill>
+                <a:latin typeface="Inter"/>
+              </a:rPr>
+              <a:t>RETO 2 · ONDERZOEK &amp; DATA</a:t>
+            </a:r>
+          </a:p>
+        </p:txBody>
+      </p:sp>
+      <p:sp>
+        <p:nvSpPr>
+          <p:cNvPr id="6" name="Titulo"/>
+          <p:cNvSpPr txBox="1"/>
+          <p:nvPr/>
+        </p:nvSpPr>
+        <p:spPr>
+          <a:xfrm>
+            <a:off x="457200" y="502920"/>
+            <a:ext cx="8412480" cy="475488"/>
+          </a:xfrm>
+          <a:prstGeom prst="rect">
+            <a:avLst/>
+          </a:prstGeom>
+          <a:noFill/>
+        </p:spPr>
+        <p:txBody>
+          <a:bodyPr wrap="square" anchor="t" lIns="45720" rIns="45720" tIns="27432" bIns="27432">
+            <a:normAutofit/>
+          </a:bodyPr>
+          <a:lstStyle/>
+          <a:p>
+            <a:pPr algn="l"/>
+            <a:r>
+              <a:rPr sz="2700" b="1">
+                <a:solidFill>
+                  <a:srgbClr val="FFFFFF"/>
+                </a:solidFill>
+                <a:latin typeface="Bricolage Grotesque"/>
+              </a:rPr>
+              <a:t>Zona horaria</a:t>
+            </a:r>
+          </a:p>
+        </p:txBody>
+      </p:sp>
+      <p:sp>
+        <p:nvSpPr>
+          <p:cNvPr id="7" name="Badges"/>
+          <p:cNvSpPr txBox="1"/>
+          <p:nvPr/>
+        </p:nvSpPr>
+        <p:spPr>
+          <a:xfrm>
+            <a:off x="9052560" y="256032"/>
+            <a:ext cx="2651760" cy="640080"/>
+          </a:xfrm>
+          <a:prstGeom prst="rect">
+            <a:avLst/>
+          </a:prstGeom>
+          <a:noFill/>
+        </p:spPr>
+        <p:txBody>
+          <a:bodyPr wrap="square" anchor="t" lIns="45720" rIns="45720" tIns="27432" bIns="27432">
+            <a:normAutofit/>
+          </a:bodyPr>
+          <a:lstStyle/>
+          <a:p>
+            <a:pPr algn="r"/>
+            <a:r>
+              <a:rPr sz="1000">
+                <a:solidFill>
+                  <a:srgbClr val="E4F4EE"/>
+                </a:solidFill>
+                <a:latin typeface="Inter"/>
+              </a:rPr>
+              <a:t>👨‍👩‍👧 En grupos</a:t>
+            </a:r>
+          </a:p>
+          <a:p>
+            <a:pPr algn="r"/>
+            <a:r>
+              <a:rPr sz="1000">
+                <a:solidFill>
+                  <a:srgbClr val="E4F4EE"/>
+                </a:solidFill>
+                <a:latin typeface="Inter"/>
+              </a:rPr>
+              <a:t>± 15 min · ★★★</a:t>
+            </a:r>
+          </a:p>
+        </p:txBody>
+      </p:sp>
+      <p:sp>
+        <p:nvSpPr>
+          <p:cNvPr id="8" name="Gancho"/>
+          <p:cNvSpPr txBox="1"/>
+          <p:nvPr/>
+        </p:nvSpPr>
+        <p:spPr>
+          <a:xfrm>
+            <a:off x="457200" y="1225296"/>
+            <a:ext cx="11274552" cy="566928"/>
+          </a:xfrm>
+          <a:prstGeom prst="rect">
+            <a:avLst/>
+          </a:prstGeom>
+          <a:noFill/>
+        </p:spPr>
+        <p:txBody>
+          <a:bodyPr wrap="square" anchor="t" lIns="45720" rIns="45720" tIns="27432" bIns="27432">
+            <a:normAutofit/>
+          </a:bodyPr>
+          <a:lstStyle/>
+          <a:p>
+            <a:pPr algn="l"/>
+            <a:r>
+              <a:rPr sz="1600" b="1">
+                <a:solidFill>
+                  <a:srgbClr val="157355"/>
+                </a:solidFill>
+                <a:latin typeface="Bricolage Grotesque"/>
+              </a:rPr>
+              <a:t>Una videollamada con Cusco, CDMX y Sevilla. Alguien siempre está durmiendo.</a:t>
+            </a:r>
+          </a:p>
+          <a:p>
+            <a:pPr algn="l"/>
+            <a:r>
+              <a:rPr sz="1100" i="1">
+                <a:solidFill>
+                  <a:srgbClr val="6A6E78"/>
+                </a:solidFill>
+                <a:latin typeface="Inter"/>
+              </a:rPr>
+              <a:t>Een videogesprek met Cusco, CDMX en Sevilla. Er slaapt altijd iemand.</a:t>
+            </a:r>
+          </a:p>
+        </p:txBody>
+      </p:sp>
+      <p:sp>
+        <p:nvSpPr>
+          <p:cNvPr id="9" name="ReglaCaja"/>
+          <p:cNvSpPr/>
+          <p:nvPr/>
+        </p:nvSpPr>
+        <p:spPr>
+          <a:xfrm>
+            <a:off x="457200" y="1847088"/>
+            <a:ext cx="11274552" cy="658368"/>
+          </a:xfrm>
+          <a:prstGeom prst="roundRect">
+            <a:avLst>
+              <a:gd name="adj" fmla="val 5000"/>
+            </a:avLst>
+          </a:prstGeom>
+          <a:solidFill>
+            <a:srgbClr val="FBF3D6"/>
+          </a:solidFill>
+          <a:ln>
+            <a:noFill/>
+          </a:ln>
+          <a:effectLst/>
+        </p:spPr>
+        <p:style>
+          <a:lnRef idx="1">
+            <a:schemeClr val="accent1"/>
+          </a:lnRef>
+          <a:fillRef idx="3">
+            <a:schemeClr val="accent1"/>
+          </a:fillRef>
+          <a:effectRef idx="2">
+            <a:schemeClr val="accent1"/>
+          </a:effectRef>
+          <a:fontRef idx="minor">
+            <a:schemeClr val="lt1"/>
+          </a:fontRef>
+        </p:style>
+        <p:txBody>
+          <a:bodyPr rtlCol="0" anchor="ctr"/>
+          <a:lstStyle/>
+          <a:p/>
+        </p:txBody>
+      </p:sp>
+      <p:sp>
+        <p:nvSpPr>
+          <p:cNvPr id="10" name="ReglaTxt"/>
+          <p:cNvSpPr txBox="1"/>
+          <p:nvPr/>
+        </p:nvSpPr>
+        <p:spPr>
+          <a:xfrm>
+            <a:off x="603504" y="1883664"/>
+            <a:ext cx="10972800" cy="585216"/>
+          </a:xfrm>
+          <a:prstGeom prst="rect">
+            <a:avLst/>
+          </a:prstGeom>
+          <a:noFill/>
+        </p:spPr>
+        <p:txBody>
+          <a:bodyPr wrap="square" anchor="t" lIns="45720" rIns="45720" tIns="27432" bIns="27432">
+            <a:normAutofit/>
+          </a:bodyPr>
+          <a:lstStyle/>
+          <a:p>
+            <a:pPr algn="l"/>
+            <a:r>
+              <a:rPr sz="850" b="1">
+                <a:solidFill>
+                  <a:srgbClr val="B7860B"/>
+                </a:solidFill>
+                <a:latin typeface="Inter"/>
+              </a:rPr>
+              <a:t>LA REGLA DEL RETO</a:t>
+            </a:r>
+          </a:p>
+          <a:p>
+            <a:pPr algn="l"/>
+            <a:r>
+              <a:rPr sz="1100">
+                <a:solidFill>
+                  <a:srgbClr val="20242E"/>
+                </a:solidFill>
+                <a:latin typeface="Inter"/>
+              </a:rPr>
+              <a:t>Iedereen moet tussen 8:00 en 22:00 lokale tijd zitten. Eén persoon buiten dat venster en het voorstel valt af.</a:t>
+            </a:r>
+          </a:p>
+        </p:txBody>
+      </p:sp>
+      <p:sp>
+        <p:nvSpPr>
+          <p:cNvPr id="11" name="Tarjeta 0"/>
+          <p:cNvSpPr/>
+          <p:nvPr/>
+        </p:nvSpPr>
+        <p:spPr>
+          <a:xfrm>
+            <a:off x="457200" y="2670048"/>
+            <a:ext cx="3660648" cy="1170432"/>
+          </a:xfrm>
+          <a:prstGeom prst="roundRect">
+            <a:avLst>
+              <a:gd name="adj" fmla="val 6000"/>
+            </a:avLst>
+          </a:prstGeom>
+          <a:solidFill>
+            <a:srgbClr val="FFFFFF"/>
+          </a:solidFill>
+          <a:ln w="12700">
+            <a:solidFill>
+              <a:srgbClr val="E4E3DE"/>
+            </a:solidFill>
+          </a:ln>
+          <a:effectLst/>
+        </p:spPr>
+        <p:style>
+          <a:lnRef idx="1">
+            <a:schemeClr val="accent1"/>
+          </a:lnRef>
+          <a:fillRef idx="3">
+            <a:schemeClr val="accent1"/>
+          </a:fillRef>
+          <a:effectRef idx="2">
+            <a:schemeClr val="accent1"/>
+          </a:effectRef>
+          <a:fontRef idx="minor">
+            <a:schemeClr val="lt1"/>
+          </a:fontRef>
+        </p:style>
+        <p:txBody>
+          <a:bodyPr rtlCol="0" anchor="ctr"/>
+          <a:lstStyle/>
+          <a:p/>
+        </p:txBody>
+      </p:sp>
+      <p:sp>
+        <p:nvSpPr>
+          <p:cNvPr id="12" name="TarjetaTxt 0"/>
+          <p:cNvSpPr txBox="1"/>
+          <p:nvPr/>
+        </p:nvSpPr>
+        <p:spPr>
+          <a:xfrm>
+            <a:off x="548640" y="2724912"/>
+            <a:ext cx="3477768" cy="1060704"/>
+          </a:xfrm>
+          <a:prstGeom prst="rect">
+            <a:avLst/>
+          </a:prstGeom>
+          <a:noFill/>
+        </p:spPr>
+        <p:txBody>
+          <a:bodyPr wrap="square" anchor="t" lIns="45720" rIns="45720" tIns="27432" bIns="27432">
+            <a:normAutofit/>
+          </a:bodyPr>
+          <a:lstStyle/>
+          <a:p>
+            <a:pPr algn="l"/>
+            <a:r>
+              <a:rPr sz="1100" b="1">
+                <a:solidFill>
+                  <a:srgbClr val="157355"/>
+                </a:solidFill>
+                <a:latin typeface="Bricolage Grotesque"/>
+              </a:rPr>
+              <a:t>Gante (Bélgica)</a:t>
+            </a:r>
+          </a:p>
+          <a:p>
+            <a:pPr algn="l"/>
+            <a:r>
+              <a:rPr sz="1000">
+                <a:solidFill>
+                  <a:srgbClr val="20242E"/>
+                </a:solidFill>
+                <a:latin typeface="Inter"/>
+              </a:rPr>
+              <a:t>misma hora que Gante</a:t>
+            </a:r>
+          </a:p>
+        </p:txBody>
+      </p:sp>
+      <p:sp>
+        <p:nvSpPr>
+          <p:cNvPr id="13" name="Tarjeta 1"/>
+          <p:cNvSpPr/>
+          <p:nvPr/>
+        </p:nvSpPr>
+        <p:spPr>
+          <a:xfrm>
+            <a:off x="4264152" y="2670048"/>
+            <a:ext cx="3660648" cy="1170432"/>
+          </a:xfrm>
+          <a:prstGeom prst="roundRect">
+            <a:avLst>
+              <a:gd name="adj" fmla="val 6000"/>
+            </a:avLst>
+          </a:prstGeom>
+          <a:solidFill>
+            <a:srgbClr val="FFFFFF"/>
+          </a:solidFill>
+          <a:ln w="12700">
+            <a:solidFill>
+              <a:srgbClr val="E4E3DE"/>
+            </a:solidFill>
+          </a:ln>
+          <a:effectLst/>
+        </p:spPr>
+        <p:style>
+          <a:lnRef idx="1">
+            <a:schemeClr val="accent1"/>
+          </a:lnRef>
+          <a:fillRef idx="3">
+            <a:schemeClr val="accent1"/>
+          </a:fillRef>
+          <a:effectRef idx="2">
+            <a:schemeClr val="accent1"/>
+          </a:effectRef>
+          <a:fontRef idx="minor">
+            <a:schemeClr val="lt1"/>
+          </a:fontRef>
+        </p:style>
+        <p:txBody>
+          <a:bodyPr rtlCol="0" anchor="ctr"/>
+          <a:lstStyle/>
+          <a:p/>
+        </p:txBody>
+      </p:sp>
+      <p:sp>
+        <p:nvSpPr>
+          <p:cNvPr id="14" name="TarjetaTxt 1"/>
+          <p:cNvSpPr txBox="1"/>
+          <p:nvPr/>
+        </p:nvSpPr>
+        <p:spPr>
+          <a:xfrm>
+            <a:off x="4355592" y="2724912"/>
+            <a:ext cx="3477768" cy="1060704"/>
+          </a:xfrm>
+          <a:prstGeom prst="rect">
+            <a:avLst/>
+          </a:prstGeom>
+          <a:noFill/>
+        </p:spPr>
+        <p:txBody>
+          <a:bodyPr wrap="square" anchor="t" lIns="45720" rIns="45720" tIns="27432" bIns="27432">
+            <a:normAutofit/>
+          </a:bodyPr>
+          <a:lstStyle/>
+          <a:p>
+            <a:pPr algn="l"/>
+            <a:r>
+              <a:rPr sz="1100" b="1">
+                <a:solidFill>
+                  <a:srgbClr val="157355"/>
+                </a:solidFill>
+                <a:latin typeface="Bricolage Grotesque"/>
+              </a:rPr>
+              <a:t>Sevilla (España)</a:t>
+            </a:r>
+          </a:p>
+          <a:p>
+            <a:pPr algn="l"/>
+            <a:r>
+              <a:rPr sz="1000">
+                <a:solidFill>
+                  <a:srgbClr val="20242E"/>
+                </a:solidFill>
+                <a:latin typeface="Inter"/>
+              </a:rPr>
+              <a:t>misma hora que Gante</a:t>
+            </a:r>
+          </a:p>
+        </p:txBody>
+      </p:sp>
+      <p:sp>
+        <p:nvSpPr>
+          <p:cNvPr id="15" name="Tarjeta 2"/>
+          <p:cNvSpPr/>
+          <p:nvPr/>
+        </p:nvSpPr>
+        <p:spPr>
+          <a:xfrm>
+            <a:off x="8071104" y="2670048"/>
+            <a:ext cx="3660648" cy="1170432"/>
+          </a:xfrm>
+          <a:prstGeom prst="roundRect">
+            <a:avLst>
+              <a:gd name="adj" fmla="val 6000"/>
+            </a:avLst>
+          </a:prstGeom>
+          <a:solidFill>
+            <a:srgbClr val="FFFFFF"/>
+          </a:solidFill>
+          <a:ln w="12700">
+            <a:solidFill>
+              <a:srgbClr val="E4E3DE"/>
+            </a:solidFill>
+          </a:ln>
+          <a:effectLst/>
+        </p:spPr>
+        <p:style>
+          <a:lnRef idx="1">
+            <a:schemeClr val="accent1"/>
+          </a:lnRef>
+          <a:fillRef idx="3">
+            <a:schemeClr val="accent1"/>
+          </a:fillRef>
+          <a:effectRef idx="2">
+            <a:schemeClr val="accent1"/>
+          </a:effectRef>
+          <a:fontRef idx="minor">
+            <a:schemeClr val="lt1"/>
+          </a:fontRef>
+        </p:style>
+        <p:txBody>
+          <a:bodyPr rtlCol="0" anchor="ctr"/>
+          <a:lstStyle/>
+          <a:p/>
+        </p:txBody>
+      </p:sp>
+      <p:sp>
+        <p:nvSpPr>
+          <p:cNvPr id="16" name="TarjetaTxt 2"/>
+          <p:cNvSpPr txBox="1"/>
+          <p:nvPr/>
+        </p:nvSpPr>
+        <p:spPr>
+          <a:xfrm>
+            <a:off x="8162544" y="2724912"/>
+            <a:ext cx="3477768" cy="1060704"/>
+          </a:xfrm>
+          <a:prstGeom prst="rect">
+            <a:avLst/>
+          </a:prstGeom>
+          <a:noFill/>
+        </p:spPr>
+        <p:txBody>
+          <a:bodyPr wrap="square" anchor="t" lIns="45720" rIns="45720" tIns="27432" bIns="27432">
+            <a:normAutofit/>
+          </a:bodyPr>
+          <a:lstStyle/>
+          <a:p>
+            <a:pPr algn="l"/>
+            <a:r>
+              <a:rPr sz="1100" b="1">
+                <a:solidFill>
+                  <a:srgbClr val="157355"/>
+                </a:solidFill>
+                <a:latin typeface="Bricolage Grotesque"/>
+              </a:rPr>
+              <a:t>Ciudad de México</a:t>
+            </a:r>
+          </a:p>
+          <a:p>
+            <a:pPr algn="l"/>
+            <a:r>
+              <a:rPr sz="1000">
+                <a:solidFill>
+                  <a:srgbClr val="20242E"/>
+                </a:solidFill>
+                <a:latin typeface="Inter"/>
+              </a:rPr>
+              <a:t>7 horas menos</a:t>
+            </a:r>
+          </a:p>
+        </p:txBody>
+      </p:sp>
+      <p:sp>
+        <p:nvSpPr>
+          <p:cNvPr id="17" name="Tarjeta 3"/>
+          <p:cNvSpPr/>
+          <p:nvPr/>
+        </p:nvSpPr>
+        <p:spPr>
+          <a:xfrm>
+            <a:off x="457200" y="3968496"/>
+            <a:ext cx="3660648" cy="1170432"/>
+          </a:xfrm>
+          <a:prstGeom prst="roundRect">
+            <a:avLst>
+              <a:gd name="adj" fmla="val 6000"/>
+            </a:avLst>
+          </a:prstGeom>
+          <a:solidFill>
+            <a:srgbClr val="FFFFFF"/>
+          </a:solidFill>
+          <a:ln w="12700">
+            <a:solidFill>
+              <a:srgbClr val="E4E3DE"/>
+            </a:solidFill>
+          </a:ln>
+          <a:effectLst/>
+        </p:spPr>
+        <p:style>
+          <a:lnRef idx="1">
+            <a:schemeClr val="accent1"/>
+          </a:lnRef>
+          <a:fillRef idx="3">
+            <a:schemeClr val="accent1"/>
+          </a:fillRef>
+          <a:effectRef idx="2">
+            <a:schemeClr val="accent1"/>
+          </a:effectRef>
+          <a:fontRef idx="minor">
+            <a:schemeClr val="lt1"/>
+          </a:fontRef>
+        </p:style>
+        <p:txBody>
+          <a:bodyPr rtlCol="0" anchor="ctr"/>
+          <a:lstStyle/>
+          <a:p/>
+        </p:txBody>
+      </p:sp>
+      <p:sp>
+        <p:nvSpPr>
+          <p:cNvPr id="18" name="TarjetaTxt 3"/>
+          <p:cNvSpPr txBox="1"/>
+          <p:nvPr/>
+        </p:nvSpPr>
+        <p:spPr>
+          <a:xfrm>
+            <a:off x="548640" y="4023360"/>
+            <a:ext cx="3477768" cy="1060704"/>
+          </a:xfrm>
+          <a:prstGeom prst="rect">
+            <a:avLst/>
+          </a:prstGeom>
+          <a:noFill/>
+        </p:spPr>
+        <p:txBody>
+          <a:bodyPr wrap="square" anchor="t" lIns="45720" rIns="45720" tIns="27432" bIns="27432">
+            <a:normAutofit/>
+          </a:bodyPr>
+          <a:lstStyle/>
+          <a:p>
+            <a:pPr algn="l"/>
+            <a:r>
+              <a:rPr sz="1100" b="1">
+                <a:solidFill>
+                  <a:srgbClr val="157355"/>
+                </a:solidFill>
+                <a:latin typeface="Bricolage Grotesque"/>
+              </a:rPr>
+              <a:t>Cusco (Perú)</a:t>
+            </a:r>
+          </a:p>
+          <a:p>
+            <a:pPr algn="l"/>
+            <a:r>
+              <a:rPr sz="1000">
+                <a:solidFill>
+                  <a:srgbClr val="20242E"/>
+                </a:solidFill>
+                <a:latin typeface="Inter"/>
+              </a:rPr>
+              <a:t>6 horas menos</a:t>
+            </a:r>
+          </a:p>
+        </p:txBody>
+      </p:sp>
+      <p:sp>
+        <p:nvSpPr>
+          <p:cNvPr id="19" name="Tarjeta 4"/>
+          <p:cNvSpPr/>
+          <p:nvPr/>
+        </p:nvSpPr>
+        <p:spPr>
+          <a:xfrm>
+            <a:off x="4264152" y="3968496"/>
+            <a:ext cx="3660648" cy="1170432"/>
+          </a:xfrm>
+          <a:prstGeom prst="roundRect">
+            <a:avLst>
+              <a:gd name="adj" fmla="val 6000"/>
+            </a:avLst>
+          </a:prstGeom>
+          <a:solidFill>
+            <a:srgbClr val="FFFFFF"/>
+          </a:solidFill>
+          <a:ln w="12700">
+            <a:solidFill>
+              <a:srgbClr val="E4E3DE"/>
+            </a:solidFill>
+          </a:ln>
+          <a:effectLst/>
+        </p:spPr>
+        <p:style>
+          <a:lnRef idx="1">
+            <a:schemeClr val="accent1"/>
+          </a:lnRef>
+          <a:fillRef idx="3">
+            <a:schemeClr val="accent1"/>
+          </a:fillRef>
+          <a:effectRef idx="2">
+            <a:schemeClr val="accent1"/>
+          </a:effectRef>
+          <a:fontRef idx="minor">
+            <a:schemeClr val="lt1"/>
+          </a:fontRef>
+        </p:style>
+        <p:txBody>
+          <a:bodyPr rtlCol="0" anchor="ctr"/>
+          <a:lstStyle/>
+          <a:p/>
+        </p:txBody>
+      </p:sp>
+      <p:sp>
+        <p:nvSpPr>
+          <p:cNvPr id="20" name="TarjetaTxt 4"/>
+          <p:cNvSpPr txBox="1"/>
+          <p:nvPr/>
+        </p:nvSpPr>
+        <p:spPr>
+          <a:xfrm>
+            <a:off x="4355592" y="4023360"/>
+            <a:ext cx="3477768" cy="1060704"/>
+          </a:xfrm>
+          <a:prstGeom prst="rect">
+            <a:avLst/>
+          </a:prstGeom>
+          <a:noFill/>
+        </p:spPr>
+        <p:txBody>
+          <a:bodyPr wrap="square" anchor="t" lIns="45720" rIns="45720" tIns="27432" bIns="27432">
+            <a:normAutofit/>
+          </a:bodyPr>
+          <a:lstStyle/>
+          <a:p>
+            <a:pPr algn="l"/>
+            <a:r>
+              <a:rPr sz="1100" b="1">
+                <a:solidFill>
+                  <a:srgbClr val="157355"/>
+                </a:solidFill>
+                <a:latin typeface="Bricolage Grotesque"/>
+              </a:rPr>
+              <a:t>marco</a:t>
+            </a:r>
+          </a:p>
+          <a:p>
+            <a:pPr algn="l"/>
+            <a:r>
+              <a:rPr sz="1000">
+                <a:solidFill>
+                  <a:srgbClr val="20242E"/>
+                </a:solidFill>
+                <a:latin typeface="Inter"/>
+              </a:rPr>
+              <a:t>En Gante son las …, en México son las … y en Cusco son las …</a:t>
+            </a:r>
+          </a:p>
+        </p:txBody>
+      </p:sp>
+      <p:sp>
+        <p:nvSpPr>
+          <p:cNvPr id="21" name="Tarjeta 5"/>
+          <p:cNvSpPr/>
+          <p:nvPr/>
+        </p:nvSpPr>
+        <p:spPr>
+          <a:xfrm>
+            <a:off x="8071104" y="3968496"/>
+            <a:ext cx="3660648" cy="1170432"/>
+          </a:xfrm>
+          <a:prstGeom prst="roundRect">
+            <a:avLst>
+              <a:gd name="adj" fmla="val 6000"/>
+            </a:avLst>
+          </a:prstGeom>
+          <a:solidFill>
+            <a:srgbClr val="FFFFFF"/>
+          </a:solidFill>
+          <a:ln w="12700">
+            <a:solidFill>
+              <a:srgbClr val="E4E3DE"/>
+            </a:solidFill>
+          </a:ln>
+          <a:effectLst/>
+        </p:spPr>
+        <p:style>
+          <a:lnRef idx="1">
+            <a:schemeClr val="accent1"/>
+          </a:lnRef>
+          <a:fillRef idx="3">
+            <a:schemeClr val="accent1"/>
+          </a:fillRef>
+          <a:effectRef idx="2">
+            <a:schemeClr val="accent1"/>
+          </a:effectRef>
+          <a:fontRef idx="minor">
+            <a:schemeClr val="lt1"/>
+          </a:fontRef>
+        </p:style>
+        <p:txBody>
+          <a:bodyPr rtlCol="0" anchor="ctr"/>
+          <a:lstStyle/>
+          <a:p/>
+        </p:txBody>
+      </p:sp>
+      <p:sp>
+        <p:nvSpPr>
+          <p:cNvPr id="22" name="TarjetaTxt 5"/>
+          <p:cNvSpPr txBox="1"/>
+          <p:nvPr/>
+        </p:nvSpPr>
+        <p:spPr>
+          <a:xfrm>
+            <a:off x="8162544" y="4023360"/>
+            <a:ext cx="3477768" cy="1060704"/>
+          </a:xfrm>
+          <a:prstGeom prst="rect">
+            <a:avLst/>
+          </a:prstGeom>
+          <a:noFill/>
+        </p:spPr>
+        <p:txBody>
+          <a:bodyPr wrap="square" anchor="t" lIns="45720" rIns="45720" tIns="27432" bIns="27432">
+            <a:normAutofit/>
+          </a:bodyPr>
+          <a:lstStyle/>
+          <a:p>
+            <a:pPr algn="l"/>
+            <a:r>
+              <a:rPr sz="1100" b="1">
+                <a:solidFill>
+                  <a:srgbClr val="157355"/>
+                </a:solidFill>
+                <a:latin typeface="Bricolage Grotesque"/>
+              </a:rPr>
+              <a:t>marco</a:t>
+            </a:r>
+          </a:p>
+          <a:p>
+            <a:pPr algn="l"/>
+            <a:r>
+              <a:rPr sz="1000">
+                <a:solidFill>
+                  <a:srgbClr val="20242E"/>
+                </a:solidFill>
+                <a:latin typeface="Inter"/>
+              </a:rPr>
+              <a:t>A las … de Bélgica, en México es demasiado temprano.</a:t>
+            </a:r>
+          </a:p>
+        </p:txBody>
+      </p:sp>
+      <p:sp>
+        <p:nvSpPr>
+          <p:cNvPr id="23" name="Tarjeta 6"/>
+          <p:cNvSpPr/>
+          <p:nvPr/>
+        </p:nvSpPr>
+        <p:spPr>
+          <a:xfrm>
+            <a:off x="457200" y="5266944"/>
+            <a:ext cx="3660648" cy="1170432"/>
+          </a:xfrm>
+          <a:prstGeom prst="roundRect">
+            <a:avLst>
+              <a:gd name="adj" fmla="val 6000"/>
+            </a:avLst>
+          </a:prstGeom>
+          <a:solidFill>
+            <a:srgbClr val="FFFFFF"/>
+          </a:solidFill>
+          <a:ln w="12700">
+            <a:solidFill>
+              <a:srgbClr val="E4E3DE"/>
+            </a:solidFill>
+          </a:ln>
+          <a:effectLst/>
+        </p:spPr>
+        <p:style>
+          <a:lnRef idx="1">
+            <a:schemeClr val="accent1"/>
+          </a:lnRef>
+          <a:fillRef idx="3">
+            <a:schemeClr val="accent1"/>
+          </a:fillRef>
+          <a:effectRef idx="2">
+            <a:schemeClr val="accent1"/>
+          </a:effectRef>
+          <a:fontRef idx="minor">
+            <a:schemeClr val="lt1"/>
+          </a:fontRef>
+        </p:style>
+        <p:txBody>
+          <a:bodyPr rtlCol="0" anchor="ctr"/>
+          <a:lstStyle/>
+          <a:p/>
+        </p:txBody>
+      </p:sp>
+      <p:sp>
+        <p:nvSpPr>
+          <p:cNvPr id="24" name="TarjetaTxt 6"/>
+          <p:cNvSpPr txBox="1"/>
+          <p:nvPr/>
+        </p:nvSpPr>
+        <p:spPr>
+          <a:xfrm>
+            <a:off x="548640" y="5321808"/>
+            <a:ext cx="3477768" cy="1060704"/>
+          </a:xfrm>
+          <a:prstGeom prst="rect">
+            <a:avLst/>
+          </a:prstGeom>
+          <a:noFill/>
+        </p:spPr>
+        <p:txBody>
+          <a:bodyPr wrap="square" anchor="t" lIns="45720" rIns="45720" tIns="27432" bIns="27432">
+            <a:normAutofit/>
+          </a:bodyPr>
+          <a:lstStyle/>
+          <a:p>
+            <a:pPr algn="l"/>
+            <a:r>
+              <a:rPr sz="1100" b="1">
+                <a:solidFill>
+                  <a:srgbClr val="157355"/>
+                </a:solidFill>
+                <a:latin typeface="Bricolage Grotesque"/>
+              </a:rPr>
+              <a:t>marco</a:t>
+            </a:r>
+          </a:p>
+          <a:p>
+            <a:pPr algn="l"/>
+            <a:r>
+              <a:rPr sz="1000">
+                <a:solidFill>
+                  <a:srgbClr val="20242E"/>
+                </a:solidFill>
+                <a:latin typeface="Inter"/>
+              </a:rPr>
+              <a:t>Quedamos a las … hora belga.</a:t>
+            </a:r>
+          </a:p>
+        </p:txBody>
+      </p:sp>
+    </p:spTree>
+  </p:cSld>
+  <p:clrMapOvr>
+    <a:masterClrMapping/>
+  </p:clrMapOvr>
+</p:sld>
+</file>
+
+<file path=ppt/slides/slide24.xml><?xml version="1.0" encoding="utf-8"?>
+<p:sld xmlns:a="http://schemas.openxmlformats.org/drawingml/2006/main" xmlns:p="http://schemas.openxmlformats.org/presentationml/2006/main" xmlns:r="http://schemas.openxmlformats.org/officeDocument/2006/relationships">
+  <p:cSld>
+    <p:spTree>
+      <p:nvGrpSpPr>
+        <p:cNvPr id="1" name=""/>
+        <p:cNvGrpSpPr/>
+        <p:nvPr/>
+      </p:nvGrpSpPr>
+      <p:grpSpPr/>
+      <p:sp>
+        <p:nvSpPr>
+          <p:cNvPr id="2" name="Fondo"/>
+          <p:cNvSpPr/>
+          <p:nvPr/>
+        </p:nvSpPr>
+        <p:spPr>
+          <a:xfrm>
+            <a:off x="0" y="0"/>
+            <a:ext cx="12191695" cy="6858000"/>
+          </a:xfrm>
+          <a:prstGeom prst="rect">
+            <a:avLst/>
+          </a:prstGeom>
+          <a:solidFill>
+            <a:srgbClr val="FCFBF8"/>
+          </a:solidFill>
+          <a:ln>
+            <a:noFill/>
+          </a:ln>
+          <a:effectLst/>
+        </p:spPr>
+        <p:style>
+          <a:lnRef idx="1">
+            <a:schemeClr val="accent1"/>
+          </a:lnRef>
+          <a:fillRef idx="3">
+            <a:schemeClr val="accent1"/>
+          </a:fillRef>
+          <a:effectRef idx="2">
+            <a:schemeClr val="accent1"/>
+          </a:effectRef>
+          <a:fontRef idx="minor">
+            <a:schemeClr val="lt1"/>
+          </a:fontRef>
+        </p:style>
+        <p:txBody>
+          <a:bodyPr rtlCol="0" anchor="ctr"/>
+          <a:lstStyle/>
+          <a:p/>
+        </p:txBody>
+      </p:sp>
+      <p:sp>
+        <p:nvSpPr>
+          <p:cNvPr id="3" name="Cabecera"/>
+          <p:cNvSpPr/>
+          <p:nvPr/>
+        </p:nvSpPr>
+        <p:spPr>
+          <a:xfrm>
+            <a:off x="0" y="0"/>
+            <a:ext cx="12191695" cy="1078992"/>
+          </a:xfrm>
+          <a:prstGeom prst="rect">
+            <a:avLst/>
+          </a:prstGeom>
+          <a:solidFill>
+            <a:srgbClr val="1E9E74"/>
+          </a:solidFill>
+          <a:ln>
+            <a:noFill/>
+          </a:ln>
+          <a:effectLst/>
+        </p:spPr>
+        <p:style>
+          <a:lnRef idx="1">
+            <a:schemeClr val="accent1"/>
+          </a:lnRef>
+          <a:fillRef idx="3">
+            <a:schemeClr val="accent1"/>
+          </a:fillRef>
+          <a:effectRef idx="2">
+            <a:schemeClr val="accent1"/>
+          </a:effectRef>
+          <a:fontRef idx="minor">
+            <a:schemeClr val="lt1"/>
+          </a:fontRef>
+        </p:style>
+        <p:txBody>
+          <a:bodyPr rtlCol="0" anchor="ctr"/>
+          <a:lstStyle/>
+          <a:p/>
+        </p:txBody>
+      </p:sp>
+      <p:sp>
+        <p:nvSpPr>
+          <p:cNvPr id="4" name="Chip"/>
+          <p:cNvSpPr/>
+          <p:nvPr/>
+        </p:nvSpPr>
+        <p:spPr>
+          <a:xfrm>
+            <a:off x="457200" y="182880"/>
+            <a:ext cx="3017520" cy="292608"/>
+          </a:xfrm>
+          <a:prstGeom prst="roundRect">
+            <a:avLst>
+              <a:gd name="adj" fmla="val 50000"/>
+            </a:avLst>
+          </a:prstGeom>
+          <a:solidFill>
+            <a:srgbClr val="FFFFFF"/>
+          </a:solidFill>
+          <a:ln>
+            <a:noFill/>
+          </a:ln>
+          <a:effectLst/>
+        </p:spPr>
+        <p:style>
+          <a:lnRef idx="1">
+            <a:schemeClr val="accent1"/>
+          </a:lnRef>
+          <a:fillRef idx="3">
+            <a:schemeClr val="accent1"/>
+          </a:fillRef>
+          <a:effectRef idx="2">
+            <a:schemeClr val="accent1"/>
+          </a:effectRef>
+          <a:fontRef idx="minor">
+            <a:schemeClr val="lt1"/>
+          </a:fontRef>
+        </p:style>
+        <p:txBody>
+          <a:bodyPr rtlCol="0" anchor="ctr"/>
+          <a:lstStyle/>
+          <a:p/>
+        </p:txBody>
+      </p:sp>
+      <p:sp>
+        <p:nvSpPr>
+          <p:cNvPr id="5" name="ChipTxt"/>
+          <p:cNvSpPr txBox="1"/>
+          <p:nvPr/>
+        </p:nvSpPr>
+        <p:spPr>
+          <a:xfrm>
+            <a:off x="457200" y="173736"/>
+            <a:ext cx="3017520" cy="310896"/>
+          </a:xfrm>
+          <a:prstGeom prst="rect">
+            <a:avLst/>
+          </a:prstGeom>
+          <a:noFill/>
+        </p:spPr>
+        <p:txBody>
+          <a:bodyPr wrap="square" anchor="ctr" lIns="45720" rIns="45720" tIns="27432" bIns="27432">
+            <a:normAutofit/>
+          </a:bodyPr>
+          <a:lstStyle/>
+          <a:p>
+            <a:pPr algn="ctr"/>
+            <a:r>
+              <a:rPr sz="950" b="1">
+                <a:solidFill>
+                  <a:srgbClr val="157355"/>
+                </a:solidFill>
+                <a:latin typeface="Inter"/>
+              </a:rPr>
+              <a:t>RETO 8 · ONDERHANDELING &amp; DILEMMA</a:t>
+            </a:r>
+          </a:p>
+        </p:txBody>
+      </p:sp>
+      <p:sp>
+        <p:nvSpPr>
+          <p:cNvPr id="6" name="Titulo"/>
+          <p:cNvSpPr txBox="1"/>
+          <p:nvPr/>
+        </p:nvSpPr>
+        <p:spPr>
+          <a:xfrm>
+            <a:off x="457200" y="502920"/>
+            <a:ext cx="8412480" cy="475488"/>
+          </a:xfrm>
+          <a:prstGeom prst="rect">
+            <a:avLst/>
+          </a:prstGeom>
+          <a:noFill/>
+        </p:spPr>
+        <p:txBody>
+          <a:bodyPr wrap="square" anchor="t" lIns="45720" rIns="45720" tIns="27432" bIns="27432">
+            <a:normAutofit/>
+          </a:bodyPr>
+          <a:lstStyle/>
+          <a:p>
+            <a:pPr algn="l"/>
+            <a:r>
+              <a:rPr sz="2700" b="1">
+                <a:solidFill>
+                  <a:srgbClr val="FFFFFF"/>
+                </a:solidFill>
+                <a:latin typeface="Bricolage Grotesque"/>
+              </a:rPr>
+              <a:t>Negocia el despertador</a:t>
+            </a:r>
+          </a:p>
+        </p:txBody>
+      </p:sp>
+      <p:sp>
+        <p:nvSpPr>
+          <p:cNvPr id="7" name="Badges"/>
+          <p:cNvSpPr txBox="1"/>
+          <p:nvPr/>
+        </p:nvSpPr>
+        <p:spPr>
+          <a:xfrm>
+            <a:off x="9052560" y="256032"/>
+            <a:ext cx="2651760" cy="640080"/>
+          </a:xfrm>
+          <a:prstGeom prst="rect">
+            <a:avLst/>
+          </a:prstGeom>
+          <a:noFill/>
+        </p:spPr>
+        <p:txBody>
+          <a:bodyPr wrap="square" anchor="t" lIns="45720" rIns="45720" tIns="27432" bIns="27432">
+            <a:normAutofit/>
+          </a:bodyPr>
+          <a:lstStyle/>
+          <a:p>
+            <a:pPr algn="r"/>
+            <a:r>
+              <a:rPr sz="1000">
+                <a:solidFill>
+                  <a:srgbClr val="E4F4EE"/>
+                </a:solidFill>
+                <a:latin typeface="Inter"/>
+              </a:rPr>
+              <a:t>👥 En parejas</a:t>
+            </a:r>
+          </a:p>
+          <a:p>
+            <a:pPr algn="r"/>
+            <a:r>
+              <a:rPr sz="1000">
+                <a:solidFill>
+                  <a:srgbClr val="E4F4EE"/>
+                </a:solidFill>
+                <a:latin typeface="Inter"/>
+              </a:rPr>
+              <a:t>± 12 min · ★★★</a:t>
+            </a:r>
+          </a:p>
+        </p:txBody>
+      </p:sp>
+      <p:sp>
+        <p:nvSpPr>
+          <p:cNvPr id="8" name="Gancho"/>
+          <p:cNvSpPr txBox="1"/>
+          <p:nvPr/>
+        </p:nvSpPr>
+        <p:spPr>
+          <a:xfrm>
+            <a:off x="457200" y="1225296"/>
+            <a:ext cx="11274552" cy="566928"/>
+          </a:xfrm>
+          <a:prstGeom prst="rect">
+            <a:avLst/>
+          </a:prstGeom>
+          <a:noFill/>
+        </p:spPr>
+        <p:txBody>
+          <a:bodyPr wrap="square" anchor="t" lIns="45720" rIns="45720" tIns="27432" bIns="27432">
+            <a:normAutofit/>
+          </a:bodyPr>
+          <a:lstStyle/>
+          <a:p>
+            <a:pPr algn="l"/>
+            <a:r>
+              <a:rPr sz="1600" b="1">
+                <a:solidFill>
+                  <a:srgbClr val="157355"/>
+                </a:solidFill>
+                <a:latin typeface="Bricolage Grotesque"/>
+              </a:rPr>
+              <a:t>Dos compañeros de habitación, dos mañanas incompatibles. Una sola alarma.</a:t>
+            </a:r>
+          </a:p>
+          <a:p>
+            <a:pPr algn="l"/>
+            <a:r>
+              <a:rPr sz="1100" i="1">
+                <a:solidFill>
+                  <a:srgbClr val="6A6E78"/>
+                </a:solidFill>
+                <a:latin typeface="Inter"/>
+              </a:rPr>
+              <a:t>Twee kamergenoten, twee onverenigbare ochtenden. Eén wekker.</a:t>
+            </a:r>
+          </a:p>
+        </p:txBody>
+      </p:sp>
+      <p:sp>
+        <p:nvSpPr>
+          <p:cNvPr id="9" name="ReglaCaja"/>
+          <p:cNvSpPr/>
+          <p:nvPr/>
+        </p:nvSpPr>
+        <p:spPr>
+          <a:xfrm>
+            <a:off x="457200" y="1847088"/>
+            <a:ext cx="11274552" cy="658368"/>
+          </a:xfrm>
+          <a:prstGeom prst="roundRect">
+            <a:avLst>
+              <a:gd name="adj" fmla="val 5000"/>
+            </a:avLst>
+          </a:prstGeom>
+          <a:solidFill>
+            <a:srgbClr val="FBF3D6"/>
+          </a:solidFill>
+          <a:ln>
+            <a:noFill/>
+          </a:ln>
+          <a:effectLst/>
+        </p:spPr>
+        <p:style>
+          <a:lnRef idx="1">
+            <a:schemeClr val="accent1"/>
+          </a:lnRef>
+          <a:fillRef idx="3">
+            <a:schemeClr val="accent1"/>
+          </a:fillRef>
+          <a:effectRef idx="2">
+            <a:schemeClr val="accent1"/>
+          </a:effectRef>
+          <a:fontRef idx="minor">
+            <a:schemeClr val="lt1"/>
+          </a:fontRef>
+        </p:style>
+        <p:txBody>
+          <a:bodyPr rtlCol="0" anchor="ctr"/>
+          <a:lstStyle/>
+          <a:p/>
+        </p:txBody>
+      </p:sp>
+      <p:sp>
+        <p:nvSpPr>
+          <p:cNvPr id="10" name="ReglaTxt"/>
+          <p:cNvSpPr txBox="1"/>
+          <p:nvPr/>
+        </p:nvSpPr>
+        <p:spPr>
+          <a:xfrm>
+            <a:off x="603504" y="1883664"/>
+            <a:ext cx="10972800" cy="585216"/>
+          </a:xfrm>
+          <a:prstGeom prst="rect">
+            <a:avLst/>
+          </a:prstGeom>
+          <a:noFill/>
+        </p:spPr>
+        <p:txBody>
+          <a:bodyPr wrap="square" anchor="t" lIns="45720" rIns="45720" tIns="27432" bIns="27432">
+            <a:normAutofit/>
+          </a:bodyPr>
+          <a:lstStyle/>
+          <a:p>
+            <a:pPr algn="l"/>
+            <a:r>
+              <a:rPr sz="850" b="1">
+                <a:solidFill>
+                  <a:srgbClr val="B7860B"/>
+                </a:solidFill>
+                <a:latin typeface="Inter"/>
+              </a:rPr>
+              <a:t>LA REGLA DEL RETO</a:t>
+            </a:r>
+          </a:p>
+          <a:p>
+            <a:pPr algn="l"/>
+            <a:r>
+              <a:rPr sz="1100">
+                <a:solidFill>
+                  <a:srgbClr val="20242E"/>
+                </a:solidFill>
+                <a:latin typeface="Inter"/>
+              </a:rPr>
+              <a:t>Elk voorstel bevat een uur én een reden met «porque». Een voorstel zonder reden mag de ander zonder meer weigeren.</a:t>
+            </a:r>
+          </a:p>
+        </p:txBody>
+      </p:sp>
+      <p:sp>
+        <p:nvSpPr>
+          <p:cNvPr id="11" name="Tarjeta 0"/>
+          <p:cNvSpPr/>
+          <p:nvPr/>
+        </p:nvSpPr>
+        <p:spPr>
+          <a:xfrm>
+            <a:off x="457200" y="2670048"/>
+            <a:ext cx="3660648" cy="1170432"/>
+          </a:xfrm>
+          <a:prstGeom prst="roundRect">
+            <a:avLst>
+              <a:gd name="adj" fmla="val 6000"/>
+            </a:avLst>
+          </a:prstGeom>
+          <a:solidFill>
+            <a:srgbClr val="FFFFFF"/>
+          </a:solidFill>
+          <a:ln w="12700">
+            <a:solidFill>
+              <a:srgbClr val="E4E3DE"/>
+            </a:solidFill>
+          </a:ln>
+          <a:effectLst/>
+        </p:spPr>
+        <p:style>
+          <a:lnRef idx="1">
+            <a:schemeClr val="accent1"/>
+          </a:lnRef>
+          <a:fillRef idx="3">
+            <a:schemeClr val="accent1"/>
+          </a:fillRef>
+          <a:effectRef idx="2">
+            <a:schemeClr val="accent1"/>
+          </a:effectRef>
+          <a:fontRef idx="minor">
+            <a:schemeClr val="lt1"/>
+          </a:fontRef>
+        </p:style>
+        <p:txBody>
+          <a:bodyPr rtlCol="0" anchor="ctr"/>
+          <a:lstStyle/>
+          <a:p/>
+        </p:txBody>
+      </p:sp>
+      <p:sp>
+        <p:nvSpPr>
+          <p:cNvPr id="12" name="TarjetaTxt 0"/>
+          <p:cNvSpPr txBox="1"/>
+          <p:nvPr/>
+        </p:nvSpPr>
+        <p:spPr>
+          <a:xfrm>
+            <a:off x="548640" y="2724912"/>
+            <a:ext cx="3477768" cy="1060704"/>
+          </a:xfrm>
+          <a:prstGeom prst="rect">
+            <a:avLst/>
+          </a:prstGeom>
+          <a:noFill/>
+        </p:spPr>
+        <p:txBody>
+          <a:bodyPr wrap="square" anchor="t" lIns="45720" rIns="45720" tIns="27432" bIns="27432">
+            <a:normAutofit/>
+          </a:bodyPr>
+          <a:lstStyle/>
+          <a:p>
+            <a:pPr algn="l"/>
+            <a:r>
+              <a:rPr sz="1100" b="1">
+                <a:solidFill>
+                  <a:srgbClr val="157355"/>
+                </a:solidFill>
+                <a:latin typeface="Bricolage Grotesque"/>
+              </a:rPr>
+              <a:t>Álex</a:t>
+            </a:r>
+          </a:p>
+          <a:p>
+            <a:pPr algn="l"/>
+            <a:r>
+              <a:rPr sz="1000">
+                <a:solidFill>
+                  <a:srgbClr val="20242E"/>
+                </a:solidFill>
+                <a:latin typeface="Inter"/>
+              </a:rPr>
+              <a:t>Entrenas a las siete de la mañana. Necesitas la ducha primero. Te acuestas a las diez.</a:t>
+            </a:r>
+          </a:p>
+        </p:txBody>
+      </p:sp>
+      <p:sp>
+        <p:nvSpPr>
+          <p:cNvPr id="13" name="Tarjeta 1"/>
+          <p:cNvSpPr/>
+          <p:nvPr/>
+        </p:nvSpPr>
+        <p:spPr>
+          <a:xfrm>
+            <a:off x="4264152" y="2670048"/>
+            <a:ext cx="3660648" cy="1170432"/>
+          </a:xfrm>
+          <a:prstGeom prst="roundRect">
+            <a:avLst>
+              <a:gd name="adj" fmla="val 6000"/>
+            </a:avLst>
+          </a:prstGeom>
+          <a:solidFill>
+            <a:srgbClr val="FFFFFF"/>
+          </a:solidFill>
+          <a:ln w="12700">
+            <a:solidFill>
+              <a:srgbClr val="E4E3DE"/>
+            </a:solidFill>
+          </a:ln>
+          <a:effectLst/>
+        </p:spPr>
+        <p:style>
+          <a:lnRef idx="1">
+            <a:schemeClr val="accent1"/>
+          </a:lnRef>
+          <a:fillRef idx="3">
+            <a:schemeClr val="accent1"/>
+          </a:fillRef>
+          <a:effectRef idx="2">
+            <a:schemeClr val="accent1"/>
+          </a:effectRef>
+          <a:fontRef idx="minor">
+            <a:schemeClr val="lt1"/>
+          </a:fontRef>
+        </p:style>
+        <p:txBody>
+          <a:bodyPr rtlCol="0" anchor="ctr"/>
+          <a:lstStyle/>
+          <a:p/>
+        </p:txBody>
+      </p:sp>
+      <p:sp>
+        <p:nvSpPr>
+          <p:cNvPr id="14" name="TarjetaTxt 1"/>
+          <p:cNvSpPr txBox="1"/>
+          <p:nvPr/>
+        </p:nvSpPr>
+        <p:spPr>
+          <a:xfrm>
+            <a:off x="4355592" y="2724912"/>
+            <a:ext cx="3477768" cy="1060704"/>
+          </a:xfrm>
+          <a:prstGeom prst="rect">
+            <a:avLst/>
+          </a:prstGeom>
+          <a:noFill/>
+        </p:spPr>
+        <p:txBody>
+          <a:bodyPr wrap="square" anchor="t" lIns="45720" rIns="45720" tIns="27432" bIns="27432">
+            <a:normAutofit/>
+          </a:bodyPr>
+          <a:lstStyle/>
+          <a:p>
+            <a:pPr algn="l"/>
+            <a:r>
+              <a:rPr sz="1100" b="1">
+                <a:solidFill>
+                  <a:srgbClr val="157355"/>
+                </a:solidFill>
+                <a:latin typeface="Bricolage Grotesque"/>
+              </a:rPr>
+              <a:t>Noa</a:t>
+            </a:r>
+          </a:p>
+          <a:p>
+            <a:pPr algn="l"/>
+            <a:r>
+              <a:rPr sz="1000">
+                <a:solidFill>
+                  <a:srgbClr val="20242E"/>
+                </a:solidFill>
+                <a:latin typeface="Inter"/>
+              </a:rPr>
+              <a:t>Estudias hasta la una de la madrugada. No puedes levantarte antes de las nueve. La luz te despierta.</a:t>
+            </a:r>
+          </a:p>
+        </p:txBody>
+      </p:sp>
+      <p:sp>
+        <p:nvSpPr>
+          <p:cNvPr id="15" name="Tarjeta 2"/>
+          <p:cNvSpPr/>
+          <p:nvPr/>
+        </p:nvSpPr>
+        <p:spPr>
+          <a:xfrm>
+            <a:off x="8071104" y="2670048"/>
+            <a:ext cx="3660648" cy="1170432"/>
+          </a:xfrm>
+          <a:prstGeom prst="roundRect">
+            <a:avLst>
+              <a:gd name="adj" fmla="val 6000"/>
+            </a:avLst>
+          </a:prstGeom>
+          <a:solidFill>
+            <a:srgbClr val="FFFFFF"/>
+          </a:solidFill>
+          <a:ln w="12700">
+            <a:solidFill>
+              <a:srgbClr val="E4E3DE"/>
+            </a:solidFill>
+          </a:ln>
+          <a:effectLst/>
+        </p:spPr>
+        <p:style>
+          <a:lnRef idx="1">
+            <a:schemeClr val="accent1"/>
+          </a:lnRef>
+          <a:fillRef idx="3">
+            <a:schemeClr val="accent1"/>
+          </a:fillRef>
+          <a:effectRef idx="2">
+            <a:schemeClr val="accent1"/>
+          </a:effectRef>
+          <a:fontRef idx="minor">
+            <a:schemeClr val="lt1"/>
+          </a:fontRef>
+        </p:style>
+        <p:txBody>
+          <a:bodyPr rtlCol="0" anchor="ctr"/>
+          <a:lstStyle/>
+          <a:p/>
+        </p:txBody>
+      </p:sp>
+      <p:sp>
+        <p:nvSpPr>
+          <p:cNvPr id="16" name="TarjetaTxt 2"/>
+          <p:cNvSpPr txBox="1"/>
+          <p:nvPr/>
+        </p:nvSpPr>
+        <p:spPr>
+          <a:xfrm>
+            <a:off x="8162544" y="2724912"/>
+            <a:ext cx="3477768" cy="1060704"/>
+          </a:xfrm>
+          <a:prstGeom prst="rect">
+            <a:avLst/>
+          </a:prstGeom>
+          <a:noFill/>
+        </p:spPr>
+        <p:txBody>
+          <a:bodyPr wrap="square" anchor="t" lIns="45720" rIns="45720" tIns="27432" bIns="27432">
+            <a:normAutofit/>
+          </a:bodyPr>
+          <a:lstStyle/>
+          <a:p>
+            <a:pPr algn="l"/>
+            <a:r>
+              <a:rPr sz="1100" b="1">
+                <a:solidFill>
+                  <a:srgbClr val="157355"/>
+                </a:solidFill>
+                <a:latin typeface="Bricolage Grotesque"/>
+              </a:rPr>
+              <a:t>marco</a:t>
+            </a:r>
+          </a:p>
+          <a:p>
+            <a:pPr algn="l"/>
+            <a:r>
+              <a:rPr sz="1000">
+                <a:solidFill>
+                  <a:srgbClr val="20242E"/>
+                </a:solidFill>
+                <a:latin typeface="Inter"/>
+              </a:rPr>
+              <a:t>Quiero levantarme a las … porque …</a:t>
+            </a:r>
+          </a:p>
+        </p:txBody>
+      </p:sp>
+      <p:sp>
+        <p:nvSpPr>
+          <p:cNvPr id="17" name="Tarjeta 3"/>
+          <p:cNvSpPr/>
+          <p:nvPr/>
+        </p:nvSpPr>
+        <p:spPr>
+          <a:xfrm>
+            <a:off x="457200" y="3968496"/>
+            <a:ext cx="3660648" cy="1170432"/>
+          </a:xfrm>
+          <a:prstGeom prst="roundRect">
+            <a:avLst>
+              <a:gd name="adj" fmla="val 6000"/>
+            </a:avLst>
+          </a:prstGeom>
+          <a:solidFill>
+            <a:srgbClr val="FFFFFF"/>
+          </a:solidFill>
+          <a:ln w="12700">
+            <a:solidFill>
+              <a:srgbClr val="E4E3DE"/>
+            </a:solidFill>
+          </a:ln>
+          <a:effectLst/>
+        </p:spPr>
+        <p:style>
+          <a:lnRef idx="1">
+            <a:schemeClr val="accent1"/>
+          </a:lnRef>
+          <a:fillRef idx="3">
+            <a:schemeClr val="accent1"/>
+          </a:fillRef>
+          <a:effectRef idx="2">
+            <a:schemeClr val="accent1"/>
+          </a:effectRef>
+          <a:fontRef idx="minor">
+            <a:schemeClr val="lt1"/>
+          </a:fontRef>
+        </p:style>
+        <p:txBody>
+          <a:bodyPr rtlCol="0" anchor="ctr"/>
+          <a:lstStyle/>
+          <a:p/>
+        </p:txBody>
+      </p:sp>
+      <p:sp>
+        <p:nvSpPr>
+          <p:cNvPr id="18" name="TarjetaTxt 3"/>
+          <p:cNvSpPr txBox="1"/>
+          <p:nvPr/>
+        </p:nvSpPr>
+        <p:spPr>
+          <a:xfrm>
+            <a:off x="548640" y="4023360"/>
+            <a:ext cx="3477768" cy="1060704"/>
+          </a:xfrm>
+          <a:prstGeom prst="rect">
+            <a:avLst/>
+          </a:prstGeom>
+          <a:noFill/>
+        </p:spPr>
+        <p:txBody>
+          <a:bodyPr wrap="square" anchor="t" lIns="45720" rIns="45720" tIns="27432" bIns="27432">
+            <a:normAutofit/>
+          </a:bodyPr>
+          <a:lstStyle/>
+          <a:p>
+            <a:pPr algn="l"/>
+            <a:r>
+              <a:rPr sz="1100" b="1">
+                <a:solidFill>
+                  <a:srgbClr val="157355"/>
+                </a:solidFill>
+                <a:latin typeface="Bricolage Grotesque"/>
+              </a:rPr>
+              <a:t>marco</a:t>
+            </a:r>
+          </a:p>
+          <a:p>
+            <a:pPr algn="l"/>
+            <a:r>
+              <a:rPr sz="1000">
+                <a:solidFill>
+                  <a:srgbClr val="20242E"/>
+                </a:solidFill>
+                <a:latin typeface="Inter"/>
+              </a:rPr>
+              <a:t>No puedo … porque …</a:t>
+            </a:r>
+          </a:p>
+        </p:txBody>
+      </p:sp>
+      <p:sp>
+        <p:nvSpPr>
+          <p:cNvPr id="19" name="Tarjeta 4"/>
+          <p:cNvSpPr/>
+          <p:nvPr/>
+        </p:nvSpPr>
+        <p:spPr>
+          <a:xfrm>
+            <a:off x="4264152" y="3968496"/>
+            <a:ext cx="3660648" cy="1170432"/>
+          </a:xfrm>
+          <a:prstGeom prst="roundRect">
+            <a:avLst>
+              <a:gd name="adj" fmla="val 6000"/>
+            </a:avLst>
+          </a:prstGeom>
+          <a:solidFill>
+            <a:srgbClr val="FFFFFF"/>
+          </a:solidFill>
+          <a:ln w="12700">
+            <a:solidFill>
+              <a:srgbClr val="E4E3DE"/>
+            </a:solidFill>
+          </a:ln>
+          <a:effectLst/>
+        </p:spPr>
+        <p:style>
+          <a:lnRef idx="1">
+            <a:schemeClr val="accent1"/>
+          </a:lnRef>
+          <a:fillRef idx="3">
+            <a:schemeClr val="accent1"/>
+          </a:fillRef>
+          <a:effectRef idx="2">
+            <a:schemeClr val="accent1"/>
+          </a:effectRef>
+          <a:fontRef idx="minor">
+            <a:schemeClr val="lt1"/>
+          </a:fontRef>
+        </p:style>
+        <p:txBody>
+          <a:bodyPr rtlCol="0" anchor="ctr"/>
+          <a:lstStyle/>
+          <a:p/>
+        </p:txBody>
+      </p:sp>
+      <p:sp>
+        <p:nvSpPr>
+          <p:cNvPr id="20" name="TarjetaTxt 4"/>
+          <p:cNvSpPr txBox="1"/>
+          <p:nvPr/>
+        </p:nvSpPr>
+        <p:spPr>
+          <a:xfrm>
+            <a:off x="4355592" y="4023360"/>
+            <a:ext cx="3477768" cy="1060704"/>
+          </a:xfrm>
+          <a:prstGeom prst="rect">
+            <a:avLst/>
+          </a:prstGeom>
+          <a:noFill/>
+        </p:spPr>
+        <p:txBody>
+          <a:bodyPr wrap="square" anchor="t" lIns="45720" rIns="45720" tIns="27432" bIns="27432">
+            <a:normAutofit/>
+          </a:bodyPr>
+          <a:lstStyle/>
+          <a:p>
+            <a:pPr algn="l"/>
+            <a:r>
+              <a:rPr sz="1100" b="1">
+                <a:solidFill>
+                  <a:srgbClr val="157355"/>
+                </a:solidFill>
+                <a:latin typeface="Bricolage Grotesque"/>
+              </a:rPr>
+              <a:t>marco</a:t>
+            </a:r>
+          </a:p>
+          <a:p>
+            <a:pPr algn="l"/>
+            <a:r>
+              <a:rPr sz="1000">
+                <a:solidFill>
+                  <a:srgbClr val="20242E"/>
+                </a:solidFill>
+                <a:latin typeface="Inter"/>
+              </a:rPr>
+              <a:t>¿Y si … a las …?</a:t>
+            </a:r>
+          </a:p>
+        </p:txBody>
+      </p:sp>
+      <p:sp>
+        <p:nvSpPr>
+          <p:cNvPr id="21" name="Tarjeta 5"/>
+          <p:cNvSpPr/>
+          <p:nvPr/>
+        </p:nvSpPr>
+        <p:spPr>
+          <a:xfrm>
+            <a:off x="8071104" y="3968496"/>
+            <a:ext cx="3660648" cy="1170432"/>
+          </a:xfrm>
+          <a:prstGeom prst="roundRect">
+            <a:avLst>
+              <a:gd name="adj" fmla="val 6000"/>
+            </a:avLst>
+          </a:prstGeom>
+          <a:solidFill>
+            <a:srgbClr val="FFFFFF"/>
+          </a:solidFill>
+          <a:ln w="12700">
+            <a:solidFill>
+              <a:srgbClr val="E4E3DE"/>
+            </a:solidFill>
+          </a:ln>
+          <a:effectLst/>
+        </p:spPr>
+        <p:style>
+          <a:lnRef idx="1">
+            <a:schemeClr val="accent1"/>
+          </a:lnRef>
+          <a:fillRef idx="3">
+            <a:schemeClr val="accent1"/>
+          </a:fillRef>
+          <a:effectRef idx="2">
+            <a:schemeClr val="accent1"/>
+          </a:effectRef>
+          <a:fontRef idx="minor">
+            <a:schemeClr val="lt1"/>
+          </a:fontRef>
+        </p:style>
+        <p:txBody>
+          <a:bodyPr rtlCol="0" anchor="ctr"/>
+          <a:lstStyle/>
+          <a:p/>
+        </p:txBody>
+      </p:sp>
+      <p:sp>
+        <p:nvSpPr>
+          <p:cNvPr id="22" name="TarjetaTxt 5"/>
+          <p:cNvSpPr txBox="1"/>
+          <p:nvPr/>
+        </p:nvSpPr>
+        <p:spPr>
+          <a:xfrm>
+            <a:off x="8162544" y="4023360"/>
+            <a:ext cx="3477768" cy="1060704"/>
+          </a:xfrm>
+          <a:prstGeom prst="rect">
+            <a:avLst/>
+          </a:prstGeom>
+          <a:noFill/>
+        </p:spPr>
+        <p:txBody>
+          <a:bodyPr wrap="square" anchor="t" lIns="45720" rIns="45720" tIns="27432" bIns="27432">
+            <a:normAutofit/>
+          </a:bodyPr>
+          <a:lstStyle/>
+          <a:p>
+            <a:pPr algn="l"/>
+            <a:r>
+              <a:rPr sz="1100" b="1">
+                <a:solidFill>
+                  <a:srgbClr val="157355"/>
+                </a:solidFill>
+                <a:latin typeface="Bricolage Grotesque"/>
+              </a:rPr>
+              <a:t>marco</a:t>
+            </a:r>
+          </a:p>
+          <a:p>
+            <a:pPr algn="l"/>
+            <a:r>
+              <a:rPr sz="1000">
+                <a:solidFill>
+                  <a:srgbClr val="20242E"/>
+                </a:solidFill>
+                <a:latin typeface="Inter"/>
+              </a:rPr>
+              <a:t>Vale, pero entonces tú …</a:t>
+            </a:r>
+          </a:p>
+        </p:txBody>
+      </p:sp>
+    </p:spTree>
+  </p:cSld>
+  <p:clrMapOvr>
+    <a:masterClrMapping/>
+  </p:clrMapOvr>
+</p:sld>
+</file>
+
+<file path=ppt/slides/slide25.xml><?xml version="1.0" encoding="utf-8"?>
+<p:sld xmlns:a="http://schemas.openxmlformats.org/drawingml/2006/main" xmlns:p="http://schemas.openxmlformats.org/presentationml/2006/main" xmlns:r="http://schemas.openxmlformats.org/officeDocument/2006/relationships">
+  <p:cSld>
+    <p:spTree>
+      <p:nvGrpSpPr>
+        <p:cNvPr id="1" name=""/>
+        <p:cNvGrpSpPr/>
+        <p:nvPr/>
+      </p:nvGrpSpPr>
+      <p:grpSpPr/>
+      <p:sp>
+        <p:nvSpPr>
+          <p:cNvPr id="2" name="Fondo"/>
+          <p:cNvSpPr/>
+          <p:nvPr/>
+        </p:nvSpPr>
+        <p:spPr>
+          <a:xfrm>
+            <a:off x="0" y="0"/>
+            <a:ext cx="12191695" cy="6858000"/>
+          </a:xfrm>
+          <a:prstGeom prst="rect">
+            <a:avLst/>
+          </a:prstGeom>
+          <a:solidFill>
+            <a:srgbClr val="FCFBF8"/>
+          </a:solidFill>
+          <a:ln>
+            <a:noFill/>
+          </a:ln>
+          <a:effectLst/>
+        </p:spPr>
+        <p:style>
+          <a:lnRef idx="1">
+            <a:schemeClr val="accent1"/>
+          </a:lnRef>
+          <a:fillRef idx="3">
+            <a:schemeClr val="accent1"/>
+          </a:fillRef>
+          <a:effectRef idx="2">
+            <a:schemeClr val="accent1"/>
+          </a:effectRef>
+          <a:fontRef idx="minor">
+            <a:schemeClr val="lt1"/>
+          </a:fontRef>
+        </p:style>
+        <p:txBody>
+          <a:bodyPr rtlCol="0" anchor="ctr"/>
+          <a:lstStyle/>
+          <a:p/>
+        </p:txBody>
+      </p:sp>
+      <p:sp>
+        <p:nvSpPr>
+          <p:cNvPr id="3" name="Cabecera"/>
+          <p:cNvSpPr/>
+          <p:nvPr/>
+        </p:nvSpPr>
+        <p:spPr>
+          <a:xfrm>
+            <a:off x="0" y="0"/>
+            <a:ext cx="12191695" cy="1078992"/>
+          </a:xfrm>
+          <a:prstGeom prst="rect">
+            <a:avLst/>
+          </a:prstGeom>
+          <a:solidFill>
+            <a:srgbClr val="1E9E74"/>
+          </a:solidFill>
+          <a:ln>
+            <a:noFill/>
+          </a:ln>
+          <a:effectLst/>
+        </p:spPr>
+        <p:style>
+          <a:lnRef idx="1">
+            <a:schemeClr val="accent1"/>
+          </a:lnRef>
+          <a:fillRef idx="3">
+            <a:schemeClr val="accent1"/>
+          </a:fillRef>
+          <a:effectRef idx="2">
+            <a:schemeClr val="accent1"/>
+          </a:effectRef>
+          <a:fontRef idx="minor">
+            <a:schemeClr val="lt1"/>
+          </a:fontRef>
+        </p:style>
+        <p:txBody>
+          <a:bodyPr rtlCol="0" anchor="ctr"/>
+          <a:lstStyle/>
+          <a:p/>
+        </p:txBody>
+      </p:sp>
+      <p:sp>
+        <p:nvSpPr>
+          <p:cNvPr id="4" name="Chip"/>
+          <p:cNvSpPr/>
+          <p:nvPr/>
+        </p:nvSpPr>
+        <p:spPr>
+          <a:xfrm>
+            <a:off x="457200" y="182880"/>
+            <a:ext cx="3017520" cy="292608"/>
+          </a:xfrm>
+          <a:prstGeom prst="roundRect">
+            <a:avLst>
+              <a:gd name="adj" fmla="val 50000"/>
+            </a:avLst>
+          </a:prstGeom>
+          <a:solidFill>
+            <a:srgbClr val="FFFFFF"/>
+          </a:solidFill>
+          <a:ln>
+            <a:noFill/>
+          </a:ln>
+          <a:effectLst/>
+        </p:spPr>
+        <p:style>
+          <a:lnRef idx="1">
+            <a:schemeClr val="accent1"/>
+          </a:lnRef>
+          <a:fillRef idx="3">
+            <a:schemeClr val="accent1"/>
+          </a:fillRef>
+          <a:effectRef idx="2">
+            <a:schemeClr val="accent1"/>
+          </a:effectRef>
+          <a:fontRef idx="minor">
+            <a:schemeClr val="lt1"/>
+          </a:fontRef>
+        </p:style>
+        <p:txBody>
+          <a:bodyPr rtlCol="0" anchor="ctr"/>
+          <a:lstStyle/>
+          <a:p/>
+        </p:txBody>
+      </p:sp>
+      <p:sp>
+        <p:nvSpPr>
+          <p:cNvPr id="5" name="ChipTxt"/>
+          <p:cNvSpPr txBox="1"/>
+          <p:nvPr/>
+        </p:nvSpPr>
+        <p:spPr>
+          <a:xfrm>
+            <a:off x="457200" y="173736"/>
+            <a:ext cx="3017520" cy="310896"/>
+          </a:xfrm>
+          <a:prstGeom prst="rect">
+            <a:avLst/>
+          </a:prstGeom>
+          <a:noFill/>
+        </p:spPr>
+        <p:txBody>
+          <a:bodyPr wrap="square" anchor="ctr" lIns="45720" rIns="45720" tIns="27432" bIns="27432">
+            <a:normAutofit/>
+          </a:bodyPr>
+          <a:lstStyle/>
+          <a:p>
+            <a:pPr algn="ctr"/>
+            <a:r>
+              <a:rPr sz="950" b="1">
+                <a:solidFill>
+                  <a:srgbClr val="157355"/>
+                </a:solidFill>
+                <a:latin typeface="Inter"/>
+              </a:rPr>
+              <a:t>RETO 10 · FORENSISCH</a:t>
+            </a:r>
+          </a:p>
+        </p:txBody>
+      </p:sp>
+      <p:sp>
+        <p:nvSpPr>
+          <p:cNvPr id="6" name="Titulo"/>
+          <p:cNvSpPr txBox="1"/>
+          <p:nvPr/>
+        </p:nvSpPr>
+        <p:spPr>
+          <a:xfrm>
+            <a:off x="457200" y="502920"/>
+            <a:ext cx="8412480" cy="475488"/>
+          </a:xfrm>
+          <a:prstGeom prst="rect">
+            <a:avLst/>
+          </a:prstGeom>
+          <a:noFill/>
+        </p:spPr>
+        <p:txBody>
+          <a:bodyPr wrap="square" anchor="t" lIns="45720" rIns="45720" tIns="27432" bIns="27432">
+            <a:normAutofit/>
+          </a:bodyPr>
+          <a:lstStyle/>
+          <a:p>
+            <a:pPr algn="l"/>
+            <a:r>
+              <a:rPr sz="2700" b="1">
+                <a:solidFill>
+                  <a:srgbClr val="FFFFFF"/>
+                </a:solidFill>
+                <a:latin typeface="Bricolage Grotesque"/>
+              </a:rPr>
+              <a:t>La coartada</a:t>
+            </a:r>
+          </a:p>
+        </p:txBody>
+      </p:sp>
+      <p:sp>
+        <p:nvSpPr>
+          <p:cNvPr id="7" name="Badges"/>
+          <p:cNvSpPr txBox="1"/>
+          <p:nvPr/>
+        </p:nvSpPr>
+        <p:spPr>
+          <a:xfrm>
+            <a:off x="9052560" y="256032"/>
+            <a:ext cx="2651760" cy="640080"/>
+          </a:xfrm>
+          <a:prstGeom prst="rect">
+            <a:avLst/>
+          </a:prstGeom>
+          <a:noFill/>
+        </p:spPr>
+        <p:txBody>
+          <a:bodyPr wrap="square" anchor="t" lIns="45720" rIns="45720" tIns="27432" bIns="27432">
+            <a:normAutofit/>
+          </a:bodyPr>
+          <a:lstStyle/>
+          <a:p>
+            <a:pPr algn="r"/>
+            <a:r>
+              <a:rPr sz="1000">
+                <a:solidFill>
+                  <a:srgbClr val="E4F4EE"/>
+                </a:solidFill>
+                <a:latin typeface="Inter"/>
+              </a:rPr>
+              <a:t>🏫 Toda la clase</a:t>
+            </a:r>
+          </a:p>
+          <a:p>
+            <a:pPr algn="r"/>
+            <a:r>
+              <a:rPr sz="1000">
+                <a:solidFill>
+                  <a:srgbClr val="E4F4EE"/>
+                </a:solidFill>
+                <a:latin typeface="Inter"/>
+              </a:rPr>
+              <a:t>± 20 min · ★★★</a:t>
+            </a:r>
+          </a:p>
+        </p:txBody>
+      </p:sp>
+      <p:sp>
+        <p:nvSpPr>
+          <p:cNvPr id="8" name="Gancho"/>
+          <p:cNvSpPr txBox="1"/>
+          <p:nvPr/>
+        </p:nvSpPr>
+        <p:spPr>
+          <a:xfrm>
+            <a:off x="457200" y="1225296"/>
+            <a:ext cx="11274552" cy="566928"/>
+          </a:xfrm>
+          <a:prstGeom prst="rect">
+            <a:avLst/>
+          </a:prstGeom>
+          <a:noFill/>
+        </p:spPr>
+        <p:txBody>
+          <a:bodyPr wrap="square" anchor="t" lIns="45720" rIns="45720" tIns="27432" bIns="27432">
+            <a:normAutofit/>
+          </a:bodyPr>
+          <a:lstStyle/>
+          <a:p>
+            <a:pPr algn="l"/>
+            <a:r>
+              <a:rPr sz="1600" b="1">
+                <a:solidFill>
+                  <a:srgbClr val="157355"/>
+                </a:solidFill>
+                <a:latin typeface="Bricolage Grotesque"/>
+              </a:rPr>
+              <a:t>Ha desaparecido la mascota de la clase. Todos tenéis que dar cuentas.</a:t>
+            </a:r>
+          </a:p>
+          <a:p>
+            <a:pPr algn="l"/>
+            <a:r>
+              <a:rPr sz="1100" i="1">
+                <a:solidFill>
+                  <a:srgbClr val="6A6E78"/>
+                </a:solidFill>
+                <a:latin typeface="Inter"/>
+              </a:rPr>
+              <a:t>De klasmascotte is verdwenen. Iedereen moet rekenschap geven.</a:t>
+            </a:r>
+          </a:p>
+        </p:txBody>
+      </p:sp>
+      <p:sp>
+        <p:nvSpPr>
+          <p:cNvPr id="9" name="ReglaCaja"/>
+          <p:cNvSpPr/>
+          <p:nvPr/>
+        </p:nvSpPr>
+        <p:spPr>
+          <a:xfrm>
+            <a:off x="457200" y="1847088"/>
+            <a:ext cx="11274552" cy="658368"/>
+          </a:xfrm>
+          <a:prstGeom prst="roundRect">
+            <a:avLst>
+              <a:gd name="adj" fmla="val 5000"/>
+            </a:avLst>
+          </a:prstGeom>
+          <a:solidFill>
+            <a:srgbClr val="FBF3D6"/>
+          </a:solidFill>
+          <a:ln>
+            <a:noFill/>
+          </a:ln>
+          <a:effectLst/>
+        </p:spPr>
+        <p:style>
+          <a:lnRef idx="1">
+            <a:schemeClr val="accent1"/>
+          </a:lnRef>
+          <a:fillRef idx="3">
+            <a:schemeClr val="accent1"/>
+          </a:fillRef>
+          <a:effectRef idx="2">
+            <a:schemeClr val="accent1"/>
+          </a:effectRef>
+          <a:fontRef idx="minor">
+            <a:schemeClr val="lt1"/>
+          </a:fontRef>
+        </p:style>
+        <p:txBody>
+          <a:bodyPr rtlCol="0" anchor="ctr"/>
+          <a:lstStyle/>
+          <a:p/>
+        </p:txBody>
+      </p:sp>
+      <p:sp>
+        <p:nvSpPr>
+          <p:cNvPr id="10" name="ReglaTxt"/>
+          <p:cNvSpPr txBox="1"/>
+          <p:nvPr/>
+        </p:nvSpPr>
+        <p:spPr>
+          <a:xfrm>
+            <a:off x="603504" y="1883664"/>
+            <a:ext cx="10972800" cy="585216"/>
+          </a:xfrm>
+          <a:prstGeom prst="rect">
+            <a:avLst/>
+          </a:prstGeom>
+          <a:noFill/>
+        </p:spPr>
+        <p:txBody>
+          <a:bodyPr wrap="square" anchor="t" lIns="45720" rIns="45720" tIns="27432" bIns="27432">
+            <a:normAutofit/>
+          </a:bodyPr>
+          <a:lstStyle/>
+          <a:p>
+            <a:pPr algn="l"/>
+            <a:r>
+              <a:rPr sz="850" b="1">
+                <a:solidFill>
+                  <a:srgbClr val="B7860B"/>
+                </a:solidFill>
+                <a:latin typeface="Inter"/>
+              </a:rPr>
+              <a:t>LA REGLA DEL RETO</a:t>
+            </a:r>
+          </a:p>
+          <a:p>
+            <a:pPr algn="l"/>
+            <a:r>
+              <a:rPr sz="1100">
+                <a:solidFill>
+                  <a:srgbClr val="20242E"/>
+                </a:solidFill>
+                <a:latin typeface="Inter"/>
+              </a:rPr>
+              <a:t>Jullie twee verhalen moeten op de vijf uren identiek zijn — maar jullie worden apart ondervraagd. Eén verschil en het alibi valt.</a:t>
+            </a:r>
+          </a:p>
+        </p:txBody>
+      </p:sp>
+      <p:sp>
+        <p:nvSpPr>
+          <p:cNvPr id="11" name="Tarjeta 0"/>
+          <p:cNvSpPr/>
+          <p:nvPr/>
+        </p:nvSpPr>
+        <p:spPr>
+          <a:xfrm>
+            <a:off x="457200" y="2670048"/>
+            <a:ext cx="3660648" cy="1170432"/>
+          </a:xfrm>
+          <a:prstGeom prst="roundRect">
+            <a:avLst>
+              <a:gd name="adj" fmla="val 6000"/>
+            </a:avLst>
+          </a:prstGeom>
+          <a:solidFill>
+            <a:srgbClr val="FFFFFF"/>
+          </a:solidFill>
+          <a:ln w="12700">
+            <a:solidFill>
+              <a:srgbClr val="E4E3DE"/>
+            </a:solidFill>
+          </a:ln>
+          <a:effectLst/>
+        </p:spPr>
+        <p:style>
+          <a:lnRef idx="1">
+            <a:schemeClr val="accent1"/>
+          </a:lnRef>
+          <a:fillRef idx="3">
+            <a:schemeClr val="accent1"/>
+          </a:fillRef>
+          <a:effectRef idx="2">
+            <a:schemeClr val="accent1"/>
+          </a:effectRef>
+          <a:fontRef idx="minor">
+            <a:schemeClr val="lt1"/>
+          </a:fontRef>
+        </p:style>
+        <p:txBody>
+          <a:bodyPr rtlCol="0" anchor="ctr"/>
+          <a:lstStyle/>
+          <a:p/>
+        </p:txBody>
+      </p:sp>
+      <p:sp>
+        <p:nvSpPr>
+          <p:cNvPr id="12" name="TarjetaTxt 0"/>
+          <p:cNvSpPr txBox="1"/>
+          <p:nvPr/>
+        </p:nvSpPr>
+        <p:spPr>
+          <a:xfrm>
+            <a:off x="548640" y="2724912"/>
+            <a:ext cx="3477768" cy="859536"/>
+          </a:xfrm>
+          <a:prstGeom prst="rect">
+            <a:avLst/>
+          </a:prstGeom>
+          <a:noFill/>
+        </p:spPr>
+        <p:txBody>
+          <a:bodyPr wrap="square" anchor="t" lIns="45720" rIns="45720" tIns="27432" bIns="27432">
+            <a:normAutofit/>
+          </a:bodyPr>
+          <a:lstStyle/>
+          <a:p>
+            <a:pPr algn="l"/>
+            <a:r>
+              <a:rPr sz="1100" b="1">
+                <a:solidFill>
+                  <a:srgbClr val="157355"/>
+                </a:solidFill>
+                <a:latin typeface="Bricolage Grotesque"/>
+              </a:rPr>
+              <a:t>Pregunta 1</a:t>
+            </a:r>
+          </a:p>
+          <a:p>
+            <a:pPr algn="l"/>
+            <a:r>
+              <a:rPr sz="1000">
+                <a:solidFill>
+                  <a:srgbClr val="20242E"/>
+                </a:solidFill>
+                <a:latin typeface="Inter"/>
+              </a:rPr>
+              <a:t>¿A qué hora salisteis del instituto?</a:t>
+            </a:r>
+          </a:p>
+        </p:txBody>
+      </p:sp>
+      <p:sp>
+        <p:nvSpPr>
+          <p:cNvPr id="13" name="Onthul 0"/>
+          <p:cNvSpPr/>
+          <p:nvPr/>
+        </p:nvSpPr>
+        <p:spPr>
+          <a:xfrm>
+            <a:off x="548640" y="3547872"/>
+            <a:ext cx="3477768" cy="237744"/>
+          </a:xfrm>
+          <a:prstGeom prst="roundRect">
+            <a:avLst>
+              <a:gd name="adj" fmla="val 20000"/>
+            </a:avLst>
+          </a:prstGeom>
+          <a:solidFill>
+            <a:srgbClr val="E4F4EE"/>
+          </a:solidFill>
+          <a:ln>
+            <a:noFill/>
+          </a:ln>
+          <a:effectLst/>
+        </p:spPr>
+        <p:style>
+          <a:lnRef idx="1">
+            <a:schemeClr val="accent1"/>
+          </a:lnRef>
+          <a:fillRef idx="3">
+            <a:schemeClr val="accent1"/>
+          </a:fillRef>
+          <a:effectRef idx="2">
+            <a:schemeClr val="accent1"/>
+          </a:effectRef>
+          <a:fontRef idx="minor">
+            <a:schemeClr val="lt1"/>
+          </a:fontRef>
+        </p:style>
+        <p:txBody>
+          <a:bodyPr rtlCol="0" anchor="ctr"/>
+          <a:lstStyle/>
+          <a:p/>
+        </p:txBody>
+      </p:sp>
+      <p:sp>
+        <p:nvSpPr>
+          <p:cNvPr id="14" name="OnthulTxt 0"/>
+          <p:cNvSpPr txBox="1"/>
+          <p:nvPr/>
+        </p:nvSpPr>
+        <p:spPr>
+          <a:xfrm>
+            <a:off x="566928" y="3547872"/>
+            <a:ext cx="3441192" cy="237744"/>
+          </a:xfrm>
+          <a:prstGeom prst="rect">
+            <a:avLst/>
+          </a:prstGeom>
+          <a:noFill/>
+        </p:spPr>
+        <p:txBody>
+          <a:bodyPr wrap="square" anchor="ctr" lIns="45720" rIns="45720" tIns="27432" bIns="27432">
+            <a:normAutofit/>
+          </a:bodyPr>
+          <a:lstStyle/>
+          <a:p>
+            <a:pPr algn="l"/>
+            <a:r>
+              <a:rPr sz="850" b="1">
+                <a:solidFill>
+                  <a:srgbClr val="157355"/>
+                </a:solidFill>
+                <a:latin typeface="Inter"/>
+              </a:rPr>
+              <a:t>vertrek</a:t>
+            </a:r>
+          </a:p>
+        </p:txBody>
+      </p:sp>
+      <p:sp>
+        <p:nvSpPr>
+          <p:cNvPr id="15" name="Tarjeta 1"/>
+          <p:cNvSpPr/>
+          <p:nvPr/>
+        </p:nvSpPr>
+        <p:spPr>
+          <a:xfrm>
+            <a:off x="4264152" y="2670048"/>
+            <a:ext cx="3660648" cy="1170432"/>
+          </a:xfrm>
+          <a:prstGeom prst="roundRect">
+            <a:avLst>
+              <a:gd name="adj" fmla="val 6000"/>
+            </a:avLst>
+          </a:prstGeom>
+          <a:solidFill>
+            <a:srgbClr val="FFFFFF"/>
+          </a:solidFill>
+          <a:ln w="12700">
+            <a:solidFill>
+              <a:srgbClr val="E4E3DE"/>
+            </a:solidFill>
+          </a:ln>
+          <a:effectLst/>
+        </p:spPr>
+        <p:style>
+          <a:lnRef idx="1">
+            <a:schemeClr val="accent1"/>
+          </a:lnRef>
+          <a:fillRef idx="3">
+            <a:schemeClr val="accent1"/>
+          </a:fillRef>
+          <a:effectRef idx="2">
+            <a:schemeClr val="accent1"/>
+          </a:effectRef>
+          <a:fontRef idx="minor">
+            <a:schemeClr val="lt1"/>
+          </a:fontRef>
+        </p:style>
+        <p:txBody>
+          <a:bodyPr rtlCol="0" anchor="ctr"/>
+          <a:lstStyle/>
+          <a:p/>
+        </p:txBody>
+      </p:sp>
+      <p:sp>
+        <p:nvSpPr>
+          <p:cNvPr id="16" name="TarjetaTxt 1"/>
+          <p:cNvSpPr txBox="1"/>
+          <p:nvPr/>
+        </p:nvSpPr>
+        <p:spPr>
+          <a:xfrm>
+            <a:off x="4355592" y="2724912"/>
+            <a:ext cx="3477768" cy="859536"/>
+          </a:xfrm>
+          <a:prstGeom prst="rect">
+            <a:avLst/>
+          </a:prstGeom>
+          <a:noFill/>
+        </p:spPr>
+        <p:txBody>
+          <a:bodyPr wrap="square" anchor="t" lIns="45720" rIns="45720" tIns="27432" bIns="27432">
+            <a:normAutofit/>
+          </a:bodyPr>
+          <a:lstStyle/>
+          <a:p>
+            <a:pPr algn="l"/>
+            <a:r>
+              <a:rPr sz="1100" b="1">
+                <a:solidFill>
+                  <a:srgbClr val="157355"/>
+                </a:solidFill>
+                <a:latin typeface="Bricolage Grotesque"/>
+              </a:rPr>
+              <a:t>Pregunta 2</a:t>
+            </a:r>
+          </a:p>
+          <a:p>
+            <a:pPr algn="l"/>
+            <a:r>
+              <a:rPr sz="1000">
+                <a:solidFill>
+                  <a:srgbClr val="20242E"/>
+                </a:solidFill>
+                <a:latin typeface="Inter"/>
+              </a:rPr>
+              <a:t>¿Dónde estabais a las cinco?</a:t>
+            </a:r>
+          </a:p>
+        </p:txBody>
+      </p:sp>
+      <p:sp>
+        <p:nvSpPr>
+          <p:cNvPr id="17" name="Onthul 1"/>
+          <p:cNvSpPr/>
+          <p:nvPr/>
+        </p:nvSpPr>
+        <p:spPr>
+          <a:xfrm>
+            <a:off x="4355592" y="3547872"/>
+            <a:ext cx="3477768" cy="237744"/>
+          </a:xfrm>
+          <a:prstGeom prst="roundRect">
+            <a:avLst>
+              <a:gd name="adj" fmla="val 20000"/>
+            </a:avLst>
+          </a:prstGeom>
+          <a:solidFill>
+            <a:srgbClr val="E4F4EE"/>
+          </a:solidFill>
+          <a:ln>
+            <a:noFill/>
+          </a:ln>
+          <a:effectLst/>
+        </p:spPr>
+        <p:style>
+          <a:lnRef idx="1">
+            <a:schemeClr val="accent1"/>
+          </a:lnRef>
+          <a:fillRef idx="3">
+            <a:schemeClr val="accent1"/>
+          </a:fillRef>
+          <a:effectRef idx="2">
+            <a:schemeClr val="accent1"/>
+          </a:effectRef>
+          <a:fontRef idx="minor">
+            <a:schemeClr val="lt1"/>
+          </a:fontRef>
+        </p:style>
+        <p:txBody>
+          <a:bodyPr rtlCol="0" anchor="ctr"/>
+          <a:lstStyle/>
+          <a:p/>
+        </p:txBody>
+      </p:sp>
+      <p:sp>
+        <p:nvSpPr>
+          <p:cNvPr id="18" name="OnthulTxt 1"/>
+          <p:cNvSpPr txBox="1"/>
+          <p:nvPr/>
+        </p:nvSpPr>
+        <p:spPr>
+          <a:xfrm>
+            <a:off x="4373880" y="3547872"/>
+            <a:ext cx="3441192" cy="237744"/>
+          </a:xfrm>
+          <a:prstGeom prst="rect">
+            <a:avLst/>
+          </a:prstGeom>
+          <a:noFill/>
+        </p:spPr>
+        <p:txBody>
+          <a:bodyPr wrap="square" anchor="ctr" lIns="45720" rIns="45720" tIns="27432" bIns="27432">
+            <a:normAutofit/>
+          </a:bodyPr>
+          <a:lstStyle/>
+          <a:p>
+            <a:pPr algn="l"/>
+            <a:r>
+              <a:rPr sz="850" b="1">
+                <a:solidFill>
+                  <a:srgbClr val="157355"/>
+                </a:solidFill>
+                <a:latin typeface="Inter"/>
+              </a:rPr>
+              <a:t>plaats</a:t>
+            </a:r>
+          </a:p>
+        </p:txBody>
+      </p:sp>
+      <p:sp>
+        <p:nvSpPr>
+          <p:cNvPr id="19" name="Tarjeta 2"/>
+          <p:cNvSpPr/>
+          <p:nvPr/>
+        </p:nvSpPr>
+        <p:spPr>
+          <a:xfrm>
+            <a:off x="8071104" y="2670048"/>
+            <a:ext cx="3660648" cy="1170432"/>
+          </a:xfrm>
+          <a:prstGeom prst="roundRect">
+            <a:avLst>
+              <a:gd name="adj" fmla="val 6000"/>
+            </a:avLst>
+          </a:prstGeom>
+          <a:solidFill>
+            <a:srgbClr val="FFFFFF"/>
+          </a:solidFill>
+          <a:ln w="12700">
+            <a:solidFill>
+              <a:srgbClr val="E4E3DE"/>
+            </a:solidFill>
+          </a:ln>
+          <a:effectLst/>
+        </p:spPr>
+        <p:style>
+          <a:lnRef idx="1">
+            <a:schemeClr val="accent1"/>
+          </a:lnRef>
+          <a:fillRef idx="3">
+            <a:schemeClr val="accent1"/>
+          </a:fillRef>
+          <a:effectRef idx="2">
+            <a:schemeClr val="accent1"/>
+          </a:effectRef>
+          <a:fontRef idx="minor">
+            <a:schemeClr val="lt1"/>
+          </a:fontRef>
+        </p:style>
+        <p:txBody>
+          <a:bodyPr rtlCol="0" anchor="ctr"/>
+          <a:lstStyle/>
+          <a:p/>
+        </p:txBody>
+      </p:sp>
+      <p:sp>
+        <p:nvSpPr>
+          <p:cNvPr id="20" name="TarjetaTxt 2"/>
+          <p:cNvSpPr txBox="1"/>
+          <p:nvPr/>
+        </p:nvSpPr>
+        <p:spPr>
+          <a:xfrm>
+            <a:off x="8162544" y="2724912"/>
+            <a:ext cx="3477768" cy="859536"/>
+          </a:xfrm>
+          <a:prstGeom prst="rect">
+            <a:avLst/>
+          </a:prstGeom>
+          <a:noFill/>
+        </p:spPr>
+        <p:txBody>
+          <a:bodyPr wrap="square" anchor="t" lIns="45720" rIns="45720" tIns="27432" bIns="27432">
+            <a:normAutofit/>
+          </a:bodyPr>
+          <a:lstStyle/>
+          <a:p>
+            <a:pPr algn="l"/>
+            <a:r>
+              <a:rPr sz="1100" b="1">
+                <a:solidFill>
+                  <a:srgbClr val="157355"/>
+                </a:solidFill>
+                <a:latin typeface="Bricolage Grotesque"/>
+              </a:rPr>
+              <a:t>Pregunta 3</a:t>
+            </a:r>
+          </a:p>
+          <a:p>
+            <a:pPr algn="l"/>
+            <a:r>
+              <a:rPr sz="1000">
+                <a:solidFill>
+                  <a:srgbClr val="20242E"/>
+                </a:solidFill>
+                <a:latin typeface="Inter"/>
+              </a:rPr>
+              <a:t>¿Qué hacíais a las seis?</a:t>
+            </a:r>
+          </a:p>
+        </p:txBody>
+      </p:sp>
+      <p:sp>
+        <p:nvSpPr>
+          <p:cNvPr id="21" name="Onthul 2"/>
+          <p:cNvSpPr/>
+          <p:nvPr/>
+        </p:nvSpPr>
+        <p:spPr>
+          <a:xfrm>
+            <a:off x="8162544" y="3547872"/>
+            <a:ext cx="3477768" cy="237744"/>
+          </a:xfrm>
+          <a:prstGeom prst="roundRect">
+            <a:avLst>
+              <a:gd name="adj" fmla="val 20000"/>
+            </a:avLst>
+          </a:prstGeom>
+          <a:solidFill>
+            <a:srgbClr val="E4F4EE"/>
+          </a:solidFill>
+          <a:ln>
+            <a:noFill/>
+          </a:ln>
+          <a:effectLst/>
+        </p:spPr>
+        <p:style>
+          <a:lnRef idx="1">
+            <a:schemeClr val="accent1"/>
+          </a:lnRef>
+          <a:fillRef idx="3">
+            <a:schemeClr val="accent1"/>
+          </a:fillRef>
+          <a:effectRef idx="2">
+            <a:schemeClr val="accent1"/>
+          </a:effectRef>
+          <a:fontRef idx="minor">
+            <a:schemeClr val="lt1"/>
+          </a:fontRef>
+        </p:style>
+        <p:txBody>
+          <a:bodyPr rtlCol="0" anchor="ctr"/>
+          <a:lstStyle/>
+          <a:p/>
+        </p:txBody>
+      </p:sp>
+      <p:sp>
+        <p:nvSpPr>
+          <p:cNvPr id="22" name="OnthulTxt 2"/>
+          <p:cNvSpPr txBox="1"/>
+          <p:nvPr/>
+        </p:nvSpPr>
+        <p:spPr>
+          <a:xfrm>
+            <a:off x="8180832" y="3547872"/>
+            <a:ext cx="3441192" cy="237744"/>
+          </a:xfrm>
+          <a:prstGeom prst="rect">
+            <a:avLst/>
+          </a:prstGeom>
+          <a:noFill/>
+        </p:spPr>
+        <p:txBody>
+          <a:bodyPr wrap="square" anchor="ctr" lIns="45720" rIns="45720" tIns="27432" bIns="27432">
+            <a:normAutofit/>
+          </a:bodyPr>
+          <a:lstStyle/>
+          <a:p>
+            <a:pPr algn="l"/>
+            <a:r>
+              <a:rPr sz="850" b="1">
+                <a:solidFill>
+                  <a:srgbClr val="157355"/>
+                </a:solidFill>
+                <a:latin typeface="Inter"/>
+              </a:rPr>
+              <a:t>bezigheid</a:t>
+            </a:r>
+          </a:p>
+        </p:txBody>
+      </p:sp>
+      <p:sp>
+        <p:nvSpPr>
+          <p:cNvPr id="23" name="Tarjeta 3"/>
+          <p:cNvSpPr/>
+          <p:nvPr/>
+        </p:nvSpPr>
+        <p:spPr>
+          <a:xfrm>
+            <a:off x="457200" y="3968496"/>
+            <a:ext cx="3660648" cy="1170432"/>
+          </a:xfrm>
+          <a:prstGeom prst="roundRect">
+            <a:avLst>
+              <a:gd name="adj" fmla="val 6000"/>
+            </a:avLst>
+          </a:prstGeom>
+          <a:solidFill>
+            <a:srgbClr val="FFFFFF"/>
+          </a:solidFill>
+          <a:ln w="12700">
+            <a:solidFill>
+              <a:srgbClr val="E4E3DE"/>
+            </a:solidFill>
+          </a:ln>
+          <a:effectLst/>
+        </p:spPr>
+        <p:style>
+          <a:lnRef idx="1">
+            <a:schemeClr val="accent1"/>
+          </a:lnRef>
+          <a:fillRef idx="3">
+            <a:schemeClr val="accent1"/>
+          </a:fillRef>
+          <a:effectRef idx="2">
+            <a:schemeClr val="accent1"/>
+          </a:effectRef>
+          <a:fontRef idx="minor">
+            <a:schemeClr val="lt1"/>
+          </a:fontRef>
+        </p:style>
+        <p:txBody>
+          <a:bodyPr rtlCol="0" anchor="ctr"/>
+          <a:lstStyle/>
+          <a:p/>
+        </p:txBody>
+      </p:sp>
+      <p:sp>
+        <p:nvSpPr>
+          <p:cNvPr id="24" name="TarjetaTxt 3"/>
+          <p:cNvSpPr txBox="1"/>
+          <p:nvPr/>
+        </p:nvSpPr>
+        <p:spPr>
+          <a:xfrm>
+            <a:off x="548640" y="4023360"/>
+            <a:ext cx="3477768" cy="859536"/>
+          </a:xfrm>
+          <a:prstGeom prst="rect">
+            <a:avLst/>
+          </a:prstGeom>
+          <a:noFill/>
+        </p:spPr>
+        <p:txBody>
+          <a:bodyPr wrap="square" anchor="t" lIns="45720" rIns="45720" tIns="27432" bIns="27432">
+            <a:normAutofit/>
+          </a:bodyPr>
+          <a:lstStyle/>
+          <a:p>
+            <a:pPr algn="l"/>
+            <a:r>
+              <a:rPr sz="1100" b="1">
+                <a:solidFill>
+                  <a:srgbClr val="157355"/>
+                </a:solidFill>
+                <a:latin typeface="Bricolage Grotesque"/>
+              </a:rPr>
+              <a:t>Pregunta 4</a:t>
+            </a:r>
+          </a:p>
+          <a:p>
+            <a:pPr algn="l"/>
+            <a:r>
+              <a:rPr sz="1000">
+                <a:solidFill>
+                  <a:srgbClr val="20242E"/>
+                </a:solidFill>
+                <a:latin typeface="Inter"/>
+              </a:rPr>
+              <a:t>¿A qué hora volvisteis a casa?</a:t>
+            </a:r>
+          </a:p>
+        </p:txBody>
+      </p:sp>
+      <p:sp>
+        <p:nvSpPr>
+          <p:cNvPr id="25" name="Onthul 3"/>
+          <p:cNvSpPr/>
+          <p:nvPr/>
+        </p:nvSpPr>
+        <p:spPr>
+          <a:xfrm>
+            <a:off x="548640" y="4846320"/>
+            <a:ext cx="3477768" cy="237744"/>
+          </a:xfrm>
+          <a:prstGeom prst="roundRect">
+            <a:avLst>
+              <a:gd name="adj" fmla="val 20000"/>
+            </a:avLst>
+          </a:prstGeom>
+          <a:solidFill>
+            <a:srgbClr val="E4F4EE"/>
+          </a:solidFill>
+          <a:ln>
+            <a:noFill/>
+          </a:ln>
+          <a:effectLst/>
+        </p:spPr>
+        <p:style>
+          <a:lnRef idx="1">
+            <a:schemeClr val="accent1"/>
+          </a:lnRef>
+          <a:fillRef idx="3">
+            <a:schemeClr val="accent1"/>
+          </a:fillRef>
+          <a:effectRef idx="2">
+            <a:schemeClr val="accent1"/>
+          </a:effectRef>
+          <a:fontRef idx="minor">
+            <a:schemeClr val="lt1"/>
+          </a:fontRef>
+        </p:style>
+        <p:txBody>
+          <a:bodyPr rtlCol="0" anchor="ctr"/>
+          <a:lstStyle/>
+          <a:p/>
+        </p:txBody>
+      </p:sp>
+      <p:sp>
+        <p:nvSpPr>
+          <p:cNvPr id="26" name="OnthulTxt 3"/>
+          <p:cNvSpPr txBox="1"/>
+          <p:nvPr/>
+        </p:nvSpPr>
+        <p:spPr>
+          <a:xfrm>
+            <a:off x="566928" y="4846320"/>
+            <a:ext cx="3441192" cy="237744"/>
+          </a:xfrm>
+          <a:prstGeom prst="rect">
+            <a:avLst/>
+          </a:prstGeom>
+          <a:noFill/>
+        </p:spPr>
+        <p:txBody>
+          <a:bodyPr wrap="square" anchor="ctr" lIns="45720" rIns="45720" tIns="27432" bIns="27432">
+            <a:normAutofit/>
+          </a:bodyPr>
+          <a:lstStyle/>
+          <a:p>
+            <a:pPr algn="l"/>
+            <a:r>
+              <a:rPr sz="850" b="1">
+                <a:solidFill>
+                  <a:srgbClr val="157355"/>
+                </a:solidFill>
+                <a:latin typeface="Inter"/>
+              </a:rPr>
+              <a:t>terugkeer</a:t>
+            </a:r>
+          </a:p>
+        </p:txBody>
+      </p:sp>
+      <p:sp>
+        <p:nvSpPr>
+          <p:cNvPr id="27" name="Tarjeta 4"/>
+          <p:cNvSpPr/>
+          <p:nvPr/>
+        </p:nvSpPr>
+        <p:spPr>
+          <a:xfrm>
+            <a:off x="4264152" y="3968496"/>
+            <a:ext cx="3660648" cy="1170432"/>
+          </a:xfrm>
+          <a:prstGeom prst="roundRect">
+            <a:avLst>
+              <a:gd name="adj" fmla="val 6000"/>
+            </a:avLst>
+          </a:prstGeom>
+          <a:solidFill>
+            <a:srgbClr val="FFFFFF"/>
+          </a:solidFill>
+          <a:ln w="12700">
+            <a:solidFill>
+              <a:srgbClr val="E4E3DE"/>
+            </a:solidFill>
+          </a:ln>
+          <a:effectLst/>
+        </p:spPr>
+        <p:style>
+          <a:lnRef idx="1">
+            <a:schemeClr val="accent1"/>
+          </a:lnRef>
+          <a:fillRef idx="3">
+            <a:schemeClr val="accent1"/>
+          </a:fillRef>
+          <a:effectRef idx="2">
+            <a:schemeClr val="accent1"/>
+          </a:effectRef>
+          <a:fontRef idx="minor">
+            <a:schemeClr val="lt1"/>
+          </a:fontRef>
+        </p:style>
+        <p:txBody>
+          <a:bodyPr rtlCol="0" anchor="ctr"/>
+          <a:lstStyle/>
+          <a:p/>
+        </p:txBody>
+      </p:sp>
+      <p:sp>
+        <p:nvSpPr>
+          <p:cNvPr id="28" name="TarjetaTxt 4"/>
+          <p:cNvSpPr txBox="1"/>
+          <p:nvPr/>
+        </p:nvSpPr>
+        <p:spPr>
+          <a:xfrm>
+            <a:off x="4355592" y="4023360"/>
+            <a:ext cx="3477768" cy="859536"/>
+          </a:xfrm>
+          <a:prstGeom prst="rect">
+            <a:avLst/>
+          </a:prstGeom>
+          <a:noFill/>
+        </p:spPr>
+        <p:txBody>
+          <a:bodyPr wrap="square" anchor="t" lIns="45720" rIns="45720" tIns="27432" bIns="27432">
+            <a:normAutofit/>
+          </a:bodyPr>
+          <a:lstStyle/>
+          <a:p>
+            <a:pPr algn="l"/>
+            <a:r>
+              <a:rPr sz="1100" b="1">
+                <a:solidFill>
+                  <a:srgbClr val="157355"/>
+                </a:solidFill>
+                <a:latin typeface="Bricolage Grotesque"/>
+              </a:rPr>
+              <a:t>Pregunta 5</a:t>
+            </a:r>
+          </a:p>
+          <a:p>
+            <a:pPr algn="l"/>
+            <a:r>
+              <a:rPr sz="1000">
+                <a:solidFill>
+                  <a:srgbClr val="20242E"/>
+                </a:solidFill>
+                <a:latin typeface="Inter"/>
+              </a:rPr>
+              <a:t>¿Con quién estabais?</a:t>
+            </a:r>
+          </a:p>
+        </p:txBody>
+      </p:sp>
+      <p:sp>
+        <p:nvSpPr>
+          <p:cNvPr id="29" name="Onthul 4"/>
+          <p:cNvSpPr/>
+          <p:nvPr/>
+        </p:nvSpPr>
+        <p:spPr>
+          <a:xfrm>
+            <a:off x="4355592" y="4846320"/>
+            <a:ext cx="3477768" cy="237744"/>
+          </a:xfrm>
+          <a:prstGeom prst="roundRect">
+            <a:avLst>
+              <a:gd name="adj" fmla="val 20000"/>
+            </a:avLst>
+          </a:prstGeom>
+          <a:solidFill>
+            <a:srgbClr val="E4F4EE"/>
+          </a:solidFill>
+          <a:ln>
+            <a:noFill/>
+          </a:ln>
+          <a:effectLst/>
+        </p:spPr>
+        <p:style>
+          <a:lnRef idx="1">
+            <a:schemeClr val="accent1"/>
+          </a:lnRef>
+          <a:fillRef idx="3">
+            <a:schemeClr val="accent1"/>
+          </a:fillRef>
+          <a:effectRef idx="2">
+            <a:schemeClr val="accent1"/>
+          </a:effectRef>
+          <a:fontRef idx="minor">
+            <a:schemeClr val="lt1"/>
+          </a:fontRef>
+        </p:style>
+        <p:txBody>
+          <a:bodyPr rtlCol="0" anchor="ctr"/>
+          <a:lstStyle/>
+          <a:p/>
+        </p:txBody>
+      </p:sp>
+      <p:sp>
+        <p:nvSpPr>
+          <p:cNvPr id="30" name="OnthulTxt 4"/>
+          <p:cNvSpPr txBox="1"/>
+          <p:nvPr/>
+        </p:nvSpPr>
+        <p:spPr>
+          <a:xfrm>
+            <a:off x="4373880" y="4846320"/>
+            <a:ext cx="3441192" cy="237744"/>
+          </a:xfrm>
+          <a:prstGeom prst="rect">
+            <a:avLst/>
+          </a:prstGeom>
+          <a:noFill/>
+        </p:spPr>
+        <p:txBody>
+          <a:bodyPr wrap="square" anchor="ctr" lIns="45720" rIns="45720" tIns="27432" bIns="27432">
+            <a:normAutofit/>
+          </a:bodyPr>
+          <a:lstStyle/>
+          <a:p>
+            <a:pPr algn="l"/>
+            <a:r>
+              <a:rPr sz="850" b="1">
+                <a:solidFill>
+                  <a:srgbClr val="157355"/>
+                </a:solidFill>
+                <a:latin typeface="Inter"/>
+              </a:rPr>
+              <a:t>getuige</a:t>
+            </a:r>
+          </a:p>
+        </p:txBody>
+      </p:sp>
+      <p:sp>
+        <p:nvSpPr>
+          <p:cNvPr id="31" name="Tarjeta 5"/>
+          <p:cNvSpPr/>
+          <p:nvPr/>
+        </p:nvSpPr>
+        <p:spPr>
+          <a:xfrm>
+            <a:off x="8071104" y="3968496"/>
+            <a:ext cx="3660648" cy="1170432"/>
+          </a:xfrm>
+          <a:prstGeom prst="roundRect">
+            <a:avLst>
+              <a:gd name="adj" fmla="val 6000"/>
+            </a:avLst>
+          </a:prstGeom>
+          <a:solidFill>
+            <a:srgbClr val="FFFFFF"/>
+          </a:solidFill>
+          <a:ln w="12700">
+            <a:solidFill>
+              <a:srgbClr val="E4E3DE"/>
+            </a:solidFill>
+          </a:ln>
+          <a:effectLst/>
+        </p:spPr>
+        <p:style>
+          <a:lnRef idx="1">
+            <a:schemeClr val="accent1"/>
+          </a:lnRef>
+          <a:fillRef idx="3">
+            <a:schemeClr val="accent1"/>
+          </a:fillRef>
+          <a:effectRef idx="2">
+            <a:schemeClr val="accent1"/>
+          </a:effectRef>
+          <a:fontRef idx="minor">
+            <a:schemeClr val="lt1"/>
+          </a:fontRef>
+        </p:style>
+        <p:txBody>
+          <a:bodyPr rtlCol="0" anchor="ctr"/>
+          <a:lstStyle/>
+          <a:p/>
+        </p:txBody>
+      </p:sp>
+      <p:sp>
+        <p:nvSpPr>
+          <p:cNvPr id="32" name="TarjetaTxt 5"/>
+          <p:cNvSpPr txBox="1"/>
+          <p:nvPr/>
+        </p:nvSpPr>
+        <p:spPr>
+          <a:xfrm>
+            <a:off x="8162544" y="4023360"/>
+            <a:ext cx="3477768" cy="1060704"/>
+          </a:xfrm>
+          <a:prstGeom prst="rect">
+            <a:avLst/>
+          </a:prstGeom>
+          <a:noFill/>
+        </p:spPr>
+        <p:txBody>
+          <a:bodyPr wrap="square" anchor="t" lIns="45720" rIns="45720" tIns="27432" bIns="27432">
+            <a:normAutofit/>
+          </a:bodyPr>
+          <a:lstStyle/>
+          <a:p>
+            <a:pPr algn="l"/>
+            <a:r>
+              <a:rPr sz="1100" b="1">
+                <a:solidFill>
+                  <a:srgbClr val="157355"/>
+                </a:solidFill>
+                <a:latin typeface="Bricolage Grotesque"/>
+              </a:rPr>
+              <a:t>marco</a:t>
+            </a:r>
+          </a:p>
+          <a:p>
+            <a:pPr algn="l"/>
+            <a:r>
+              <a:rPr sz="1000">
+                <a:solidFill>
+                  <a:srgbClr val="20242E"/>
+                </a:solidFill>
+                <a:latin typeface="Inter"/>
+              </a:rPr>
+              <a:t>A las … salimos del instituto.</a:t>
+            </a:r>
+          </a:p>
+        </p:txBody>
+      </p:sp>
+      <p:sp>
+        <p:nvSpPr>
+          <p:cNvPr id="33" name="Tarjeta 6"/>
+          <p:cNvSpPr/>
+          <p:nvPr/>
+        </p:nvSpPr>
+        <p:spPr>
+          <a:xfrm>
+            <a:off x="457200" y="5266944"/>
+            <a:ext cx="3660648" cy="1170432"/>
+          </a:xfrm>
+          <a:prstGeom prst="roundRect">
+            <a:avLst>
+              <a:gd name="adj" fmla="val 6000"/>
+            </a:avLst>
+          </a:prstGeom>
+          <a:solidFill>
+            <a:srgbClr val="FFFFFF"/>
+          </a:solidFill>
+          <a:ln w="12700">
+            <a:solidFill>
+              <a:srgbClr val="E4E3DE"/>
+            </a:solidFill>
+          </a:ln>
+          <a:effectLst/>
+        </p:spPr>
+        <p:style>
+          <a:lnRef idx="1">
+            <a:schemeClr val="accent1"/>
+          </a:lnRef>
+          <a:fillRef idx="3">
+            <a:schemeClr val="accent1"/>
+          </a:fillRef>
+          <a:effectRef idx="2">
+            <a:schemeClr val="accent1"/>
+          </a:effectRef>
+          <a:fontRef idx="minor">
+            <a:schemeClr val="lt1"/>
+          </a:fontRef>
+        </p:style>
+        <p:txBody>
+          <a:bodyPr rtlCol="0" anchor="ctr"/>
+          <a:lstStyle/>
+          <a:p/>
+        </p:txBody>
+      </p:sp>
+      <p:sp>
+        <p:nvSpPr>
+          <p:cNvPr id="34" name="TarjetaTxt 6"/>
+          <p:cNvSpPr txBox="1"/>
+          <p:nvPr/>
+        </p:nvSpPr>
+        <p:spPr>
+          <a:xfrm>
+            <a:off x="548640" y="5321808"/>
+            <a:ext cx="3477768" cy="1060704"/>
+          </a:xfrm>
+          <a:prstGeom prst="rect">
+            <a:avLst/>
+          </a:prstGeom>
+          <a:noFill/>
+        </p:spPr>
+        <p:txBody>
+          <a:bodyPr wrap="square" anchor="t" lIns="45720" rIns="45720" tIns="27432" bIns="27432">
+            <a:normAutofit/>
+          </a:bodyPr>
+          <a:lstStyle/>
+          <a:p>
+            <a:pPr algn="l"/>
+            <a:r>
+              <a:rPr sz="1100" b="1">
+                <a:solidFill>
+                  <a:srgbClr val="157355"/>
+                </a:solidFill>
+                <a:latin typeface="Bricolage Grotesque"/>
+              </a:rPr>
+              <a:t>marco</a:t>
+            </a:r>
+          </a:p>
+          <a:p>
+            <a:pPr algn="l"/>
+            <a:r>
+              <a:rPr sz="1000">
+                <a:solidFill>
+                  <a:srgbClr val="20242E"/>
+                </a:solidFill>
+                <a:latin typeface="Inter"/>
+              </a:rPr>
+              <a:t>A las … estamos en …</a:t>
+            </a:r>
+          </a:p>
+        </p:txBody>
+      </p:sp>
+      <p:sp>
+        <p:nvSpPr>
+          <p:cNvPr id="35" name="Tarjeta 7"/>
+          <p:cNvSpPr/>
+          <p:nvPr/>
+        </p:nvSpPr>
+        <p:spPr>
+          <a:xfrm>
+            <a:off x="4264152" y="5266944"/>
+            <a:ext cx="3660648" cy="1170432"/>
+          </a:xfrm>
+          <a:prstGeom prst="roundRect">
+            <a:avLst>
+              <a:gd name="adj" fmla="val 6000"/>
+            </a:avLst>
+          </a:prstGeom>
+          <a:solidFill>
+            <a:srgbClr val="FFFFFF"/>
+          </a:solidFill>
+          <a:ln w="12700">
+            <a:solidFill>
+              <a:srgbClr val="E4E3DE"/>
+            </a:solidFill>
+          </a:ln>
+          <a:effectLst/>
+        </p:spPr>
+        <p:style>
+          <a:lnRef idx="1">
+            <a:schemeClr val="accent1"/>
+          </a:lnRef>
+          <a:fillRef idx="3">
+            <a:schemeClr val="accent1"/>
+          </a:fillRef>
+          <a:effectRef idx="2">
+            <a:schemeClr val="accent1"/>
+          </a:effectRef>
+          <a:fontRef idx="minor">
+            <a:schemeClr val="lt1"/>
+          </a:fontRef>
+        </p:style>
+        <p:txBody>
+          <a:bodyPr rtlCol="0" anchor="ctr"/>
+          <a:lstStyle/>
+          <a:p/>
+        </p:txBody>
+      </p:sp>
+      <p:sp>
+        <p:nvSpPr>
+          <p:cNvPr id="36" name="TarjetaTxt 7"/>
+          <p:cNvSpPr txBox="1"/>
+          <p:nvPr/>
+        </p:nvSpPr>
+        <p:spPr>
+          <a:xfrm>
+            <a:off x="4355592" y="5321808"/>
+            <a:ext cx="3477768" cy="1060704"/>
+          </a:xfrm>
+          <a:prstGeom prst="rect">
+            <a:avLst/>
+          </a:prstGeom>
+          <a:noFill/>
+        </p:spPr>
+        <p:txBody>
+          <a:bodyPr wrap="square" anchor="t" lIns="45720" rIns="45720" tIns="27432" bIns="27432">
+            <a:normAutofit/>
+          </a:bodyPr>
+          <a:lstStyle/>
+          <a:p>
+            <a:pPr algn="l"/>
+            <a:r>
+              <a:rPr sz="1100" b="1">
+                <a:solidFill>
+                  <a:srgbClr val="157355"/>
+                </a:solidFill>
+                <a:latin typeface="Bricolage Grotesque"/>
+              </a:rPr>
+              <a:t>marco</a:t>
+            </a:r>
+          </a:p>
+          <a:p>
+            <a:pPr algn="l"/>
+            <a:r>
+              <a:rPr sz="1000">
+                <a:solidFill>
+                  <a:srgbClr val="20242E"/>
+                </a:solidFill>
+                <a:latin typeface="Inter"/>
+              </a:rPr>
+              <a:t>Después vamos a … y volvemos a las …</a:t>
+            </a:r>
+          </a:p>
+        </p:txBody>
+      </p:sp>
+    </p:spTree>
+  </p:cSld>
+  <p:clrMapOvr>
+    <a:masterClrMapping/>
+  </p:clrMapOvr>
+  <p:timing>
+    <p:tnLst>
+      <p:par>
+        <p:cTn id="1" dur="indefinite" restart="never" nodeType="tmRoot">
+          <p:childTnLst>
+            <p:seq concurrent="1" nextAc="seek">
+              <p:cTn id="2" dur="indefinite" nodeType="mainSeq">
+                <p:childTnLst>
+                  <p:par>
+                    <p:cTn id="5" fill="hold">
+                      <p:stCondLst>
+                        <p:cond delay="indefinite"/>
+                      </p:stCondLst>
+                      <p:childTnLst>
+                        <p:par>
+                          <p:cTn id="6" fill="hold">
+                            <p:stCondLst>
+                              <p:cond delay="0"/>
+                            </p:stCondLst>
+                            <p:childTnLst>
+                              <p:par>
+                                <p:cTn id="7" presetID="10" presetClass="entr" presetSubtype="0" fill="hold" grpId="0" nodeType="clickEffect">
+                                  <p:stCondLst>
+                                    <p:cond delay="0"/>
+                                  </p:stCondLst>
+                                  <p:childTnLst>
+                                    <p:set>
+                                      <p:cBhvr>
+                                        <p:cTn id="8" dur="1" fill="hold">
+                                          <p:stCondLst>
+                                            <p:cond delay="0"/>
+                                          </p:stCondLst>
+                                        </p:cTn>
+                                        <p:tgtEl>
+                                          <p:spTgt spid="13"/>
+                                        </p:tgtEl>
+                                        <p:attrNameLst>
+                                          <p:attrName>style.visibility</p:attrName>
+                                        </p:attrNameLst>
+                                      </p:cBhvr>
+                                      <p:to>
+                                        <p:strVal val="visible"/>
+                                      </p:to>
+                                    </p:set>
+                                    <p:animEffect transition="in" filter="fade">
+                                      <p:cBhvr>
+                                        <p:cTn id="9" dur="500"/>
+                                        <p:tgtEl>
+                                          <p:spTgt spid="13"/>
+                                        </p:tgtEl>
+                                      </p:cBhvr>
+                                    </p:animEffect>
+                                  </p:childTnLst>
+                                </p:cTn>
+                              </p:par>
+                            </p:childTnLst>
+                          </p:cTn>
+                        </p:par>
+                      </p:childTnLst>
+                    </p:cTn>
+                  </p:par>
+                  <p:par>
+                    <p:cTn id="10" fill="hold">
+                      <p:stCondLst>
+                        <p:cond delay="indefinite"/>
+                      </p:stCondLst>
+                      <p:childTnLst>
+                        <p:par>
+                          <p:cTn id="11" fill="hold">
+                            <p:stCondLst>
+                              <p:cond delay="0"/>
+                            </p:stCondLst>
+                            <p:childTnLst>
+                              <p:par>
+                                <p:cTn id="12" presetID="10" presetClass="entr" presetSubtype="0" fill="hold" grpId="0" nodeType="clickEffect">
+                                  <p:stCondLst>
+                                    <p:cond delay="0"/>
+                                  </p:stCondLst>
+                                  <p:childTnLst>
+                                    <p:set>
+                                      <p:cBhvr>
+                                        <p:cTn id="13" dur="1" fill="hold">
+                                          <p:stCondLst>
+                                            <p:cond delay="0"/>
+                                          </p:stCondLst>
+                                        </p:cTn>
+                                        <p:tgtEl>
+                                          <p:spTgt spid="14"/>
+                                        </p:tgtEl>
+                                        <p:attrNameLst>
+                                          <p:attrName>style.visibility</p:attrName>
+                                        </p:attrNameLst>
+                                      </p:cBhvr>
+                                      <p:to>
+                                        <p:strVal val="visible"/>
+                                      </p:to>
+                                    </p:set>
+                                    <p:animEffect transition="in" filter="fade">
+                                      <p:cBhvr>
+                                        <p:cTn id="14" dur="500"/>
+                                        <p:tgtEl>
+                                          <p:spTgt spid="14"/>
+                                        </p:tgtEl>
+                                      </p:cBhvr>
+                                    </p:animEffect>
+                                  </p:childTnLst>
+                                </p:cTn>
+                              </p:par>
+                            </p:childTnLst>
+                          </p:cTn>
+                        </p:par>
+                      </p:childTnLst>
+                    </p:cTn>
+                  </p:par>
+                  <p:par>
+                    <p:cTn id="15" fill="hold">
+                      <p:stCondLst>
+                        <p:cond delay="indefinite"/>
+                      </p:stCondLst>
+                      <p:childTnLst>
+                        <p:par>
+                          <p:cTn id="16" fill="hold">
+                            <p:stCondLst>
+                              <p:cond delay="0"/>
+                            </p:stCondLst>
+                            <p:childTnLst>
+                              <p:par>
+                                <p:cTn id="17" presetID="10" presetClass="entr" presetSubtype="0" fill="hold" grpId="0" nodeType="clickEffect">
+                                  <p:stCondLst>
+                                    <p:cond delay="0"/>
+                                  </p:stCondLst>
+                                  <p:childTnLst>
+                                    <p:set>
+                                      <p:cBhvr>
+                                        <p:cTn id="18" dur="1" fill="hold">
+                                          <p:stCondLst>
+                                            <p:cond delay="0"/>
+                                          </p:stCondLst>
+                                        </p:cTn>
+                                        <p:tgtEl>
+                                          <p:spTgt spid="17"/>
+                                        </p:tgtEl>
+                                        <p:attrNameLst>
+                                          <p:attrName>style.visibility</p:attrName>
+                                        </p:attrNameLst>
+                                      </p:cBhvr>
+                                      <p:to>
+                                        <p:strVal val="visible"/>
+                                      </p:to>
+                                    </p:set>
+                                    <p:animEffect transition="in" filter="fade">
+                                      <p:cBhvr>
+                                        <p:cTn id="19" dur="500"/>
+                                        <p:tgtEl>
+                                          <p:spTgt spid="17"/>
+                                        </p:tgtEl>
+                                      </p:cBhvr>
+                                    </p:animEffect>
+                                  </p:childTnLst>
+                                </p:cTn>
+                              </p:par>
+                            </p:childTnLst>
+                          </p:cTn>
+                        </p:par>
+                      </p:childTnLst>
+                    </p:cTn>
+                  </p:par>
+                  <p:par>
+                    <p:cTn id="20" fill="hold">
+                      <p:stCondLst>
+                        <p:cond delay="indefinite"/>
+                      </p:stCondLst>
+                      <p:childTnLst>
+                        <p:par>
+                          <p:cTn id="21" fill="hold">
+                            <p:stCondLst>
+                              <p:cond delay="0"/>
+                            </p:stCondLst>
+                            <p:childTnLst>
+                              <p:par>
+                                <p:cTn id="22" presetID="10" presetClass="entr" presetSubtype="0" fill="hold" grpId="0" nodeType="clickEffect">
+                                  <p:stCondLst>
+                                    <p:cond delay="0"/>
+                                  </p:stCondLst>
+                                  <p:childTnLst>
+                                    <p:set>
+                                      <p:cBhvr>
+                                        <p:cTn id="23" dur="1" fill="hold">
+                                          <p:stCondLst>
+                                            <p:cond delay="0"/>
+                                          </p:stCondLst>
+                                        </p:cTn>
+                                        <p:tgtEl>
+                                          <p:spTgt spid="18"/>
+                                        </p:tgtEl>
+                                        <p:attrNameLst>
+                                          <p:attrName>style.visibility</p:attrName>
+                                        </p:attrNameLst>
+                                      </p:cBhvr>
+                                      <p:to>
+                                        <p:strVal val="visible"/>
+                                      </p:to>
+                                    </p:set>
+                                    <p:animEffect transition="in" filter="fade">
+                                      <p:cBhvr>
+                                        <p:cTn id="24" dur="500"/>
+                                        <p:tgtEl>
+                                          <p:spTgt spid="18"/>
+                                        </p:tgtEl>
+                                      </p:cBhvr>
+                                    </p:animEffect>
+                                  </p:childTnLst>
+                                </p:cTn>
+                              </p:par>
+                            </p:childTnLst>
+                          </p:cTn>
+                        </p:par>
+                      </p:childTnLst>
+                    </p:cTn>
+                  </p:par>
+                  <p:par>
+                    <p:cTn id="25" fill="hold">
+                      <p:stCondLst>
+                        <p:cond delay="indefinite"/>
+                      </p:stCondLst>
+                      <p:childTnLst>
+                        <p:par>
+                          <p:cTn id="26" fill="hold">
+                            <p:stCondLst>
+                              <p:cond delay="0"/>
+                            </p:stCondLst>
+                            <p:childTnLst>
+                              <p:par>
+                                <p:cTn id="27" presetID="10" presetClass="entr" presetSubtype="0" fill="hold" grpId="0" nodeType="clickEffect">
+                                  <p:stCondLst>
+                                    <p:cond delay="0"/>
+                                  </p:stCondLst>
+                                  <p:childTnLst>
+                                    <p:set>
+                                      <p:cBhvr>
+                                        <p:cTn id="28" dur="1" fill="hold">
+                                          <p:stCondLst>
+                                            <p:cond delay="0"/>
+                                          </p:stCondLst>
+                                        </p:cTn>
+                                        <p:tgtEl>
+                                          <p:spTgt spid="21"/>
+                                        </p:tgtEl>
+                                        <p:attrNameLst>
+                                          <p:attrName>style.visibility</p:attrName>
+                                        </p:attrNameLst>
+                                      </p:cBhvr>
+                                      <p:to>
+                                        <p:strVal val="visible"/>
+                                      </p:to>
+                                    </p:set>
+                                    <p:animEffect transition="in" filter="fade">
+                                      <p:cBhvr>
+                                        <p:cTn id="29" dur="500"/>
+                                        <p:tgtEl>
+                                          <p:spTgt spid="21"/>
+                                        </p:tgtEl>
+                                      </p:cBhvr>
+                                    </p:animEffect>
+                                  </p:childTnLst>
+                                </p:cTn>
+                              </p:par>
+                            </p:childTnLst>
+                          </p:cTn>
+                        </p:par>
+                      </p:childTnLst>
+                    </p:cTn>
+                  </p:par>
+                  <p:par>
+                    <p:cTn id="30" fill="hold">
+                      <p:stCondLst>
+                        <p:cond delay="indefinite"/>
+                      </p:stCondLst>
+                      <p:childTnLst>
+                        <p:par>
+                          <p:cTn id="31" fill="hold">
+                            <p:stCondLst>
+                              <p:cond delay="0"/>
+                            </p:stCondLst>
+                            <p:childTnLst>
+                              <p:par>
+                                <p:cTn id="32" presetID="10" presetClass="entr" presetSubtype="0" fill="hold" grpId="0" nodeType="clickEffect">
+                                  <p:stCondLst>
+                                    <p:cond delay="0"/>
+                                  </p:stCondLst>
+                                  <p:childTnLst>
+                                    <p:set>
+                                      <p:cBhvr>
+                                        <p:cTn id="33" dur="1" fill="hold">
+                                          <p:stCondLst>
+                                            <p:cond delay="0"/>
+                                          </p:stCondLst>
+                                        </p:cTn>
+                                        <p:tgtEl>
+                                          <p:spTgt spid="22"/>
+                                        </p:tgtEl>
+                                        <p:attrNameLst>
+                                          <p:attrName>style.visibility</p:attrName>
+                                        </p:attrNameLst>
+                                      </p:cBhvr>
+                                      <p:to>
+                                        <p:strVal val="visible"/>
+                                      </p:to>
+                                    </p:set>
+                                    <p:animEffect transition="in" filter="fade">
+                                      <p:cBhvr>
+                                        <p:cTn id="34" dur="500"/>
+                                        <p:tgtEl>
+                                          <p:spTgt spid="22"/>
+                                        </p:tgtEl>
+                                      </p:cBhvr>
+                                    </p:animEffect>
+                                  </p:childTnLst>
+                                </p:cTn>
+                              </p:par>
+                            </p:childTnLst>
+                          </p:cTn>
+                        </p:par>
+                      </p:childTnLst>
+                    </p:cTn>
+                  </p:par>
+                  <p:par>
+                    <p:cTn id="35" fill="hold">
+                      <p:stCondLst>
+                        <p:cond delay="indefinite"/>
+                      </p:stCondLst>
+                      <p:childTnLst>
+                        <p:par>
+                          <p:cTn id="36" fill="hold">
+                            <p:stCondLst>
+                              <p:cond delay="0"/>
+                            </p:stCondLst>
+                            <p:childTnLst>
+                              <p:par>
+                                <p:cTn id="37" presetID="10" presetClass="entr" presetSubtype="0" fill="hold" grpId="0" nodeType="clickEffect">
+                                  <p:stCondLst>
+                                    <p:cond delay="0"/>
+                                  </p:stCondLst>
+                                  <p:childTnLst>
+                                    <p:set>
+                                      <p:cBhvr>
+                                        <p:cTn id="38" dur="1" fill="hold">
+                                          <p:stCondLst>
+                                            <p:cond delay="0"/>
+                                          </p:stCondLst>
+                                        </p:cTn>
+                                        <p:tgtEl>
+                                          <p:spTgt spid="25"/>
+                                        </p:tgtEl>
+                                        <p:attrNameLst>
+                                          <p:attrName>style.visibility</p:attrName>
+                                        </p:attrNameLst>
+                                      </p:cBhvr>
+                                      <p:to>
+                                        <p:strVal val="visible"/>
+                                      </p:to>
+                                    </p:set>
+                                    <p:animEffect transition="in" filter="fade">
+                                      <p:cBhvr>
+                                        <p:cTn id="39" dur="500"/>
+                                        <p:tgtEl>
+                                          <p:spTgt spid="25"/>
+                                        </p:tgtEl>
+                                      </p:cBhvr>
+                                    </p:animEffect>
+                                  </p:childTnLst>
+                                </p:cTn>
+                              </p:par>
+                            </p:childTnLst>
+                          </p:cTn>
+                        </p:par>
+                      </p:childTnLst>
+                    </p:cTn>
+                  </p:par>
+                  <p:par>
+                    <p:cTn id="40" fill="hold">
+                      <p:stCondLst>
+                        <p:cond delay="indefinite"/>
+                      </p:stCondLst>
+                      <p:childTnLst>
+                        <p:par>
+                          <p:cTn id="41" fill="hold">
+                            <p:stCondLst>
+                              <p:cond delay="0"/>
+                            </p:stCondLst>
+                            <p:childTnLst>
+                              <p:par>
+                                <p:cTn id="42" presetID="10" presetClass="entr" presetSubtype="0" fill="hold" grpId="0" nodeType="clickEffect">
+                                  <p:stCondLst>
+                                    <p:cond delay="0"/>
+                                  </p:stCondLst>
+                                  <p:childTnLst>
+                                    <p:set>
+                                      <p:cBhvr>
+                                        <p:cTn id="43" dur="1" fill="hold">
+                                          <p:stCondLst>
+                                            <p:cond delay="0"/>
+                                          </p:stCondLst>
+                                        </p:cTn>
+                                        <p:tgtEl>
+                                          <p:spTgt spid="26"/>
+                                        </p:tgtEl>
+                                        <p:attrNameLst>
+                                          <p:attrName>style.visibility</p:attrName>
+                                        </p:attrNameLst>
+                                      </p:cBhvr>
+                                      <p:to>
+                                        <p:strVal val="visible"/>
+                                      </p:to>
+                                    </p:set>
+                                    <p:animEffect transition="in" filter="fade">
+                                      <p:cBhvr>
+                                        <p:cTn id="44" dur="500"/>
+                                        <p:tgtEl>
+                                          <p:spTgt spid="26"/>
+                                        </p:tgtEl>
+                                      </p:cBhvr>
+                                    </p:animEffect>
+                                  </p:childTnLst>
+                                </p:cTn>
+                              </p:par>
+                            </p:childTnLst>
+                          </p:cTn>
+                        </p:par>
+                      </p:childTnLst>
+                    </p:cTn>
+                  </p:par>
+                  <p:par>
+                    <p:cTn id="45" fill="hold">
+                      <p:stCondLst>
+                        <p:cond delay="indefinite"/>
+                      </p:stCondLst>
+                      <p:childTnLst>
+                        <p:par>
+                          <p:cTn id="46" fill="hold">
+                            <p:stCondLst>
+                              <p:cond delay="0"/>
+                            </p:stCondLst>
+                            <p:childTnLst>
+                              <p:par>
+                                <p:cTn id="47" presetID="10" presetClass="entr" presetSubtype="0" fill="hold" grpId="0" nodeType="clickEffect">
+                                  <p:stCondLst>
+                                    <p:cond delay="0"/>
+                                  </p:stCondLst>
+                                  <p:childTnLst>
+                                    <p:set>
+                                      <p:cBhvr>
+                                        <p:cTn id="48" dur="1" fill="hold">
+                                          <p:stCondLst>
+                                            <p:cond delay="0"/>
+                                          </p:stCondLst>
+                                        </p:cTn>
+                                        <p:tgtEl>
+                                          <p:spTgt spid="29"/>
+                                        </p:tgtEl>
+                                        <p:attrNameLst>
+                                          <p:attrName>style.visibility</p:attrName>
+                                        </p:attrNameLst>
+                                      </p:cBhvr>
+                                      <p:to>
+                                        <p:strVal val="visible"/>
+                                      </p:to>
+                                    </p:set>
+                                    <p:animEffect transition="in" filter="fade">
+                                      <p:cBhvr>
+                                        <p:cTn id="49" dur="500"/>
+                                        <p:tgtEl>
+                                          <p:spTgt spid="29"/>
+                                        </p:tgtEl>
+                                      </p:cBhvr>
+                                    </p:animEffect>
+                                  </p:childTnLst>
+                                </p:cTn>
+                              </p:par>
+                            </p:childTnLst>
+                          </p:cTn>
+                        </p:par>
+                      </p:childTnLst>
+                    </p:cTn>
+                  </p:par>
+                  <p:par>
+                    <p:cTn id="50" fill="hold">
+                      <p:stCondLst>
+                        <p:cond delay="indefinite"/>
+                      </p:stCondLst>
+                      <p:childTnLst>
+                        <p:par>
+                          <p:cTn id="51" fill="hold">
+                            <p:stCondLst>
+                              <p:cond delay="0"/>
+                            </p:stCondLst>
+                            <p:childTnLst>
+                              <p:par>
+                                <p:cTn id="52" presetID="10" presetClass="entr" presetSubtype="0" fill="hold" grpId="0" nodeType="clickEffect">
+                                  <p:stCondLst>
+                                    <p:cond delay="0"/>
+                                  </p:stCondLst>
+                                  <p:childTnLst>
+                                    <p:set>
+                                      <p:cBhvr>
+                                        <p:cTn id="53" dur="1" fill="hold">
+                                          <p:stCondLst>
+                                            <p:cond delay="0"/>
+                                          </p:stCondLst>
+                                        </p:cTn>
+                                        <p:tgtEl>
+                                          <p:spTgt spid="30"/>
+                                        </p:tgtEl>
+                                        <p:attrNameLst>
+                                          <p:attrName>style.visibility</p:attrName>
+                                        </p:attrNameLst>
+                                      </p:cBhvr>
+                                      <p:to>
+                                        <p:strVal val="visible"/>
+                                      </p:to>
+                                    </p:set>
+                                    <p:animEffect transition="in" filter="fade">
+                                      <p:cBhvr>
+                                        <p:cTn id="54" dur="500"/>
+                                        <p:tgtEl>
+                                          <p:spTgt spid="30"/>
+                                        </p:tgtEl>
+                                      </p:cBhvr>
+                                    </p:animEffect>
+                                  </p:childTnLst>
+                                </p:cTn>
+                              </p:par>
+                            </p:childTnLst>
+                          </p:cTn>
+                        </p:par>
+                      </p:childTnLst>
+                    </p:cTn>
+                  </p:par>
+                </p:childTnLst>
+              </p:cTn>
+              <p:prevCondLst>
+                <p:cond evt="onPrev" delay="0">
+                  <p:tgtEl>
+                    <p:sldTgt/>
+                  </p:tgtEl>
+                </p:cond>
+              </p:prevCondLst>
+              <p:nextCondLst>
+                <p:cond evt="onNext" delay="0">
+                  <p:tgtEl>
+                    <p:sldTgt/>
+                  </p:tgtEl>
+                </p:cond>
+              </p:nextCondLst>
+            </p:seq>
+          </p:childTnLst>
+        </p:cTn>
+      </p:par>
+    </p:tnLst>
+  </p:timing>
 </p:sld>
 </file>
 
